--- a/docs/ユーザ手順書.pptx
+++ b/docs/ユーザ手順書.pptx
@@ -7,9 +7,11 @@
   <p:sldIdLst>
     <p:sldId id="256" r:id="rId2"/>
     <p:sldId id="257" r:id="rId3"/>
+    <p:sldId id="279" r:id="rId29"/>
     <p:sldId id="258" r:id="rId4"/>
     <p:sldId id="259" r:id="rId5"/>
     <p:sldId id="260" r:id="rId6"/>
+    <p:sldId id="280" r:id="rId30"/>
     <p:sldId id="261" r:id="rId7"/>
     <p:sldId id="262" r:id="rId8"/>
     <p:sldId id="263" r:id="rId9"/>
@@ -17,6 +19,7 @@
     <p:sldId id="265" r:id="rId11"/>
     <p:sldId id="266" r:id="rId12"/>
     <p:sldId id="267" r:id="rId13"/>
+    <p:sldId id="281" r:id="rId31"/>
     <p:sldId id="268" r:id="rId14"/>
     <p:sldId id="269" r:id="rId15"/>
     <p:sldId id="270" r:id="rId16"/>
@@ -27,6 +30,7 @@
     <p:sldId id="275" r:id="rId21"/>
     <p:sldId id="276" r:id="rId22"/>
     <p:sldId id="277" r:id="rId23"/>
+    <p:sldId id="282" r:id="rId32"/>
     <p:sldId id="278" r:id="rId24"/>
   </p:sldIdLst>
   <p:sldSz cx="12192000" cy="6858000"/>
@@ -140,6 +144,57 @@
           </p15:clr>
         </p15:guide>
       </p15:sldGuideLst>
+    </p:ext>
+    <p:ext uri="{521415D9-36F7-43E2-AB2F-B90AF26B5E84}">
+      <ns1:sectionLst xmlns:ns1="http://schemas.microsoft.com/office/powerpoint/2010/main">
+        <ns1:section name="表紙・全体の流れ" id="{00000001-1111-4A2B-9C3D-000000000001}">
+          <ns1:sldIdLst>
+            <ns1:sldId id="256"/>
+            <ns1:sldId id="257"/>
+          </ns1:sldIdLst>
+        </ns1:section>
+        <ns1:section name="PART 1 セットアップ" id="{00000002-1111-4A2B-9C3D-000000000002}">
+          <ns1:sldIdLst>
+            <ns1:sldId id="279"/>
+            <ns1:sldId id="258"/>
+            <ns1:sldId id="259"/>
+            <ns1:sldId id="260"/>
+          </ns1:sldIdLst>
+        </ns1:section>
+        <ns1:section name="PART 2 目標をつくる" id="{00000003-1111-4A2B-9C3D-000000000003}">
+          <ns1:sldIdLst>
+            <ns1:sldId id="280"/>
+            <ns1:sldId id="261"/>
+            <ns1:sldId id="262"/>
+            <ns1:sldId id="263"/>
+            <ns1:sldId id="264"/>
+            <ns1:sldId id="265"/>
+            <ns1:sldId id="266"/>
+            <ns1:sldId id="267"/>
+          </ns1:sldIdLst>
+        </ns1:section>
+        <ns1:section name="PART 3 毎日つかう" id="{00000004-1111-4A2B-9C3D-000000000004}">
+          <ns1:sldIdLst>
+            <ns1:sldId id="281"/>
+            <ns1:sldId id="268"/>
+            <ns1:sldId id="269"/>
+            <ns1:sldId id="270"/>
+            <ns1:sldId id="271"/>
+            <ns1:sldId id="272"/>
+            <ns1:sldId id="273"/>
+            <ns1:sldId id="274"/>
+            <ns1:sldId id="275"/>
+            <ns1:sldId id="276"/>
+            <ns1:sldId id="277"/>
+          </ns1:sldIdLst>
+        </ns1:section>
+        <ns1:section name="PART 4 目標を整理する" id="{00000005-1111-4A2B-9C3D-000000000005}">
+          <ns1:sldIdLst>
+            <ns1:sldId id="282"/>
+            <ns1:sldId id="278"/>
+          </ns1:sldIdLst>
+        </ns1:section>
+      </ns1:sectionLst>
     </p:ext>
   </p:extLst>
 </p:presentation>
@@ -3886,7 +3941,7 @@
                 <a:latin typeface="游ゴシック"/>
                 <a:ea typeface="游ゴシック"/>
               </a:rPr>
-              <a:t>10 / 23</a:t>
+              <a:t>12 / 27</a:t>
             </a:r>
           </a:p>
         </p:txBody>
@@ -4294,7 +4349,7 @@
                 <a:latin typeface="游ゴシック"/>
                 <a:ea typeface="游ゴシック"/>
               </a:rPr>
-              <a:t>11 / 23</a:t>
+              <a:t>13 / 27</a:t>
             </a:r>
           </a:p>
         </p:txBody>
@@ -4799,7 +4854,7 @@
                 <a:latin typeface="游ゴシック"/>
                 <a:ea typeface="游ゴシック"/>
               </a:rPr>
-              <a:t>12 / 23</a:t>
+              <a:t>14 / 27</a:t>
             </a:r>
           </a:p>
         </p:txBody>
@@ -5275,7 +5330,7 @@
                 <a:latin typeface="游ゴシック"/>
                 <a:ea typeface="游ゴシック"/>
               </a:rPr>
-              <a:t>13 / 23</a:t>
+              <a:t>16 / 27</a:t>
             </a:r>
           </a:p>
         </p:txBody>
@@ -5683,7 +5738,7 @@
                 <a:latin typeface="游ゴシック"/>
                 <a:ea typeface="游ゴシック"/>
               </a:rPr>
-              <a:t>14 / 23</a:t>
+              <a:t>17 / 27</a:t>
             </a:r>
           </a:p>
         </p:txBody>
@@ -6068,7 +6123,7 @@
                 <a:latin typeface="游ゴシック"/>
                 <a:ea typeface="游ゴシック"/>
               </a:rPr>
-              <a:t>15 / 23</a:t>
+              <a:t>18 / 27</a:t>
             </a:r>
           </a:p>
         </p:txBody>
@@ -6476,7 +6531,7 @@
                 <a:latin typeface="游ゴシック"/>
                 <a:ea typeface="游ゴシック"/>
               </a:rPr>
-              <a:t>16 / 23</a:t>
+              <a:t>19 / 27</a:t>
             </a:r>
           </a:p>
         </p:txBody>
@@ -6861,7 +6916,7 @@
                 <a:latin typeface="游ゴシック"/>
                 <a:ea typeface="游ゴシック"/>
               </a:rPr>
-              <a:t>17 / 23</a:t>
+              <a:t>20 / 27</a:t>
             </a:r>
           </a:p>
         </p:txBody>
@@ -7246,7 +7301,7 @@
                 <a:latin typeface="游ゴシック"/>
                 <a:ea typeface="游ゴシック"/>
               </a:rPr>
-              <a:t>18 / 23</a:t>
+              <a:t>21 / 27</a:t>
             </a:r>
           </a:p>
         </p:txBody>
@@ -7631,7 +7686,7 @@
                 <a:latin typeface="游ゴシック"/>
                 <a:ea typeface="游ゴシック"/>
               </a:rPr>
-              <a:t>19 / 23</a:t>
+              <a:t>22 / 27</a:t>
             </a:r>
           </a:p>
         </p:txBody>
@@ -8875,7 +8930,7 @@
                 <a:latin typeface="游ゴシック"/>
                 <a:ea typeface="游ゴシック"/>
               </a:rPr>
-              <a:t>2 / 23</a:t>
+              <a:t>2 / 27</a:t>
             </a:r>
           </a:p>
         </p:txBody>
@@ -9260,7 +9315,7 @@
                 <a:latin typeface="游ゴシック"/>
                 <a:ea typeface="游ゴシック"/>
               </a:rPr>
-              <a:t>20 / 23</a:t>
+              <a:t>23 / 27</a:t>
             </a:r>
           </a:p>
         </p:txBody>
@@ -9645,7 +9700,7 @@
                 <a:latin typeface="游ゴシック"/>
                 <a:ea typeface="游ゴシック"/>
               </a:rPr>
-              <a:t>21 / 23</a:t>
+              <a:t>24 / 27</a:t>
             </a:r>
           </a:p>
         </p:txBody>
@@ -10030,7 +10085,7 @@
                 <a:latin typeface="游ゴシック"/>
                 <a:ea typeface="游ゴシック"/>
               </a:rPr>
-              <a:t>22 / 23</a:t>
+              <a:t>25 / 27</a:t>
             </a:r>
           </a:p>
         </p:txBody>
@@ -10529,7 +10584,3011 @@
                 <a:latin typeface="游ゴシック"/>
                 <a:ea typeface="游ゴシック"/>
               </a:rPr>
-              <a:t>23 / 23</a:t>
+              <a:t>27 / 27</a:t>
+            </a:r>
+          </a:p>
+        </p:txBody>
+      </p:sp>
+    </p:spTree>
+  </p:cSld>
+  <p:clrMapOvr>
+    <a:masterClrMapping/>
+  </p:clrMapOvr>
+</p:sld>
+</file>
+
+<file path=ppt/slides/slide24.xml><?xml version="1.0" encoding="utf-8"?>
+<p:sld xmlns:a="http://schemas.openxmlformats.org/drawingml/2006/main" xmlns:p="http://schemas.openxmlformats.org/presentationml/2006/main" xmlns:r="http://schemas.openxmlformats.org/officeDocument/2006/relationships">
+  <p:cSld>
+    <p:spTree>
+      <p:nvGrpSpPr>
+        <p:cNvPr id="1" name=""/>
+        <p:cNvGrpSpPr/>
+        <p:nvPr/>
+      </p:nvGrpSpPr>
+      <p:grpSpPr/>
+      <p:sp>
+        <p:nvSpPr>
+          <p:cNvPr id="2" name="Rectangle 1"/>
+          <p:cNvSpPr/>
+          <p:nvPr/>
+        </p:nvSpPr>
+        <p:spPr>
+          <a:xfrm>
+            <a:off x="0" y="0"/>
+            <a:ext cx="12192000" cy="6858000"/>
+          </a:xfrm>
+          <a:prstGeom prst="rect">
+            <a:avLst/>
+          </a:prstGeom>
+          <a:solidFill>
+            <a:srgbClr val="1F3864"/>
+          </a:solidFill>
+          <a:ln>
+            <a:noFill/>
+          </a:ln>
+          <a:effectLst/>
+        </p:spPr>
+        <p:style>
+          <a:lnRef idx="1">
+            <a:schemeClr val="accent1"/>
+          </a:lnRef>
+          <a:fillRef idx="3">
+            <a:schemeClr val="accent1"/>
+          </a:fillRef>
+          <a:effectRef idx="2">
+            <a:schemeClr val="accent1"/>
+          </a:effectRef>
+          <a:fontRef idx="minor">
+            <a:schemeClr val="lt1"/>
+          </a:fontRef>
+        </p:style>
+        <p:txBody>
+          <a:bodyPr rtlCol="0" anchor="ctr"/>
+          <a:lstStyle/>
+          <a:p>
+            <a:pPr algn="ctr"/>
+          </a:p>
+        </p:txBody>
+      </p:sp>
+      <p:sp>
+        <p:nvSpPr>
+          <p:cNvPr id="3" name="Rounded Rectangle 2"/>
+          <p:cNvSpPr/>
+          <p:nvPr/>
+        </p:nvSpPr>
+        <p:spPr>
+          <a:xfrm>
+            <a:off x="5726200" y="1400000"/>
+            <a:ext cx="1400000" cy="380000"/>
+          </a:xfrm>
+          <a:prstGeom prst="roundRect">
+            <a:avLst>
+              <a:gd name="adj" fmla="val 40000"/>
+            </a:avLst>
+          </a:prstGeom>
+          <a:solidFill>
+            <a:srgbClr val="7FB0FF"/>
+          </a:solidFill>
+          <a:ln>
+            <a:noFill/>
+          </a:ln>
+          <a:effectLst/>
+        </p:spPr>
+        <p:style>
+          <a:lnRef idx="1">
+            <a:schemeClr val="accent1"/>
+          </a:lnRef>
+          <a:fillRef idx="3">
+            <a:schemeClr val="accent1"/>
+          </a:fillRef>
+          <a:effectRef idx="2">
+            <a:schemeClr val="accent1"/>
+          </a:effectRef>
+          <a:fontRef idx="minor">
+            <a:schemeClr val="lt1"/>
+          </a:fontRef>
+        </p:style>
+        <p:txBody>
+          <a:bodyPr rtlCol="0" anchor="ctr" wrap="none" lIns="0" rIns="0"/>
+          <a:lstStyle/>
+          <a:p>
+            <a:pPr algn="ctr"/>
+            <a:r>
+              <a:rPr sz="1000" b="1" lang="ja-JP" altLang="en-US">
+                <a:solidFill>
+                  <a:srgbClr val="1F3864"/>
+                </a:solidFill>
+                <a:latin typeface="游ゴシック"/>
+                <a:ea typeface="游ゴシック"/>
+                <a:cs typeface="游ゴシック"/>
+              </a:rPr>
+              <a:t>1 セットアップ</a:t>
+            </a:r>
+          </a:p>
+        </p:txBody>
+      </p:sp>
+      <p:sp>
+        <p:nvSpPr>
+          <p:cNvPr id="4" name="Rounded Rectangle 3"/>
+          <p:cNvSpPr/>
+          <p:nvPr/>
+        </p:nvSpPr>
+        <p:spPr>
+          <a:xfrm>
+            <a:off x="7186200" y="1400000"/>
+            <a:ext cx="1400000" cy="380000"/>
+          </a:xfrm>
+          <a:prstGeom prst="roundRect">
+            <a:avLst>
+              <a:gd name="adj" fmla="val 40000"/>
+            </a:avLst>
+          </a:prstGeom>
+          <a:solidFill>
+            <a:srgbClr val="2A4A7F"/>
+          </a:solidFill>
+          <a:ln>
+            <a:noFill/>
+          </a:ln>
+          <a:effectLst/>
+        </p:spPr>
+        <p:style>
+          <a:lnRef idx="1">
+            <a:schemeClr val="accent1"/>
+          </a:lnRef>
+          <a:fillRef idx="3">
+            <a:schemeClr val="accent1"/>
+          </a:fillRef>
+          <a:effectRef idx="2">
+            <a:schemeClr val="accent1"/>
+          </a:effectRef>
+          <a:fontRef idx="minor">
+            <a:schemeClr val="lt1"/>
+          </a:fontRef>
+        </p:style>
+        <p:txBody>
+          <a:bodyPr rtlCol="0" anchor="ctr" wrap="none" lIns="0" rIns="0"/>
+          <a:lstStyle/>
+          <a:p>
+            <a:pPr algn="ctr"/>
+            <a:r>
+              <a:rPr sz="1000" b="0" lang="ja-JP" altLang="en-US">
+                <a:solidFill>
+                  <a:srgbClr val="9CB3D9"/>
+                </a:solidFill>
+                <a:latin typeface="游ゴシック"/>
+                <a:ea typeface="游ゴシック"/>
+                <a:cs typeface="游ゴシック"/>
+              </a:rPr>
+              <a:t>2 目標をつくる</a:t>
+            </a:r>
+          </a:p>
+        </p:txBody>
+      </p:sp>
+      <p:sp>
+        <p:nvSpPr>
+          <p:cNvPr id="5" name="Rounded Rectangle 4"/>
+          <p:cNvSpPr/>
+          <p:nvPr/>
+        </p:nvSpPr>
+        <p:spPr>
+          <a:xfrm>
+            <a:off x="8646200" y="1400000"/>
+            <a:ext cx="1400000" cy="380000"/>
+          </a:xfrm>
+          <a:prstGeom prst="roundRect">
+            <a:avLst>
+              <a:gd name="adj" fmla="val 40000"/>
+            </a:avLst>
+          </a:prstGeom>
+          <a:solidFill>
+            <a:srgbClr val="2A4A7F"/>
+          </a:solidFill>
+          <a:ln>
+            <a:noFill/>
+          </a:ln>
+          <a:effectLst/>
+        </p:spPr>
+        <p:style>
+          <a:lnRef idx="1">
+            <a:schemeClr val="accent1"/>
+          </a:lnRef>
+          <a:fillRef idx="3">
+            <a:schemeClr val="accent1"/>
+          </a:fillRef>
+          <a:effectRef idx="2">
+            <a:schemeClr val="accent1"/>
+          </a:effectRef>
+          <a:fontRef idx="minor">
+            <a:schemeClr val="lt1"/>
+          </a:fontRef>
+        </p:style>
+        <p:txBody>
+          <a:bodyPr rtlCol="0" anchor="ctr" wrap="none" lIns="0" rIns="0"/>
+          <a:lstStyle/>
+          <a:p>
+            <a:pPr algn="ctr"/>
+            <a:r>
+              <a:rPr sz="1000" b="0" lang="ja-JP" altLang="en-US">
+                <a:solidFill>
+                  <a:srgbClr val="9CB3D9"/>
+                </a:solidFill>
+                <a:latin typeface="游ゴシック"/>
+                <a:ea typeface="游ゴシック"/>
+                <a:cs typeface="游ゴシック"/>
+              </a:rPr>
+              <a:t>3 毎日つかう</a:t>
+            </a:r>
+          </a:p>
+        </p:txBody>
+      </p:sp>
+      <p:sp>
+        <p:nvSpPr>
+          <p:cNvPr id="6" name="Rounded Rectangle 5"/>
+          <p:cNvSpPr/>
+          <p:nvPr/>
+        </p:nvSpPr>
+        <p:spPr>
+          <a:xfrm>
+            <a:off x="10106200" y="1400000"/>
+            <a:ext cx="1400000" cy="380000"/>
+          </a:xfrm>
+          <a:prstGeom prst="roundRect">
+            <a:avLst>
+              <a:gd name="adj" fmla="val 40000"/>
+            </a:avLst>
+          </a:prstGeom>
+          <a:solidFill>
+            <a:srgbClr val="2A4A7F"/>
+          </a:solidFill>
+          <a:ln>
+            <a:noFill/>
+          </a:ln>
+          <a:effectLst/>
+        </p:spPr>
+        <p:style>
+          <a:lnRef idx="1">
+            <a:schemeClr val="accent1"/>
+          </a:lnRef>
+          <a:fillRef idx="3">
+            <a:schemeClr val="accent1"/>
+          </a:fillRef>
+          <a:effectRef idx="2">
+            <a:schemeClr val="accent1"/>
+          </a:effectRef>
+          <a:fontRef idx="minor">
+            <a:schemeClr val="lt1"/>
+          </a:fontRef>
+        </p:style>
+        <p:txBody>
+          <a:bodyPr rtlCol="0" anchor="ctr" wrap="none" lIns="0" rIns="0"/>
+          <a:lstStyle/>
+          <a:p>
+            <a:pPr algn="ctr"/>
+            <a:r>
+              <a:rPr sz="1000" b="0" lang="ja-JP" altLang="en-US">
+                <a:solidFill>
+                  <a:srgbClr val="9CB3D9"/>
+                </a:solidFill>
+                <a:latin typeface="游ゴシック"/>
+                <a:ea typeface="游ゴシック"/>
+                <a:cs typeface="游ゴシック"/>
+              </a:rPr>
+              <a:t>4 整理する</a:t>
+            </a:r>
+          </a:p>
+        </p:txBody>
+      </p:sp>
+      <p:sp>
+        <p:nvSpPr>
+          <p:cNvPr id="7" name="TextBox 6"/>
+          <p:cNvSpPr txBox="1"/>
+          <p:nvPr/>
+        </p:nvSpPr>
+        <p:spPr>
+          <a:xfrm>
+            <a:off x="685800" y="1400000"/>
+            <a:ext cx="4000000" cy="380000"/>
+          </a:xfrm>
+          <a:prstGeom prst="rect">
+            <a:avLst/>
+          </a:prstGeom>
+          <a:noFill/>
+        </p:spPr>
+        <p:txBody>
+          <a:bodyPr wrap="square" lIns="0" rIns="0" tIns="0" bIns="0">
+            <a:spAutoFit/>
+          </a:bodyPr>
+          <a:lstStyle/>
+          <a:p>
+            <a:pPr algn="l">
+              <a:lnSpc>
+                <a:spcPct val="130000"/>
+              </a:lnSpc>
+              <a:spcBef>
+                <a:spcPts val="0"/>
+              </a:spcBef>
+              <a:spcAft>
+                <a:spcPts val="0"/>
+              </a:spcAft>
+            </a:pPr>
+            <a:r>
+              <a:rPr sz="1400" b="1" lang="ja-JP" altLang="en-US">
+                <a:solidFill>
+                  <a:srgbClr val="7FB0FF"/>
+                </a:solidFill>
+                <a:latin typeface="游ゴシック"/>
+                <a:ea typeface="游ゴシック"/>
+                <a:cs typeface="游ゴシック"/>
+              </a:rPr>
+              <a:t>PART 1</a:t>
+            </a:r>
+          </a:p>
+        </p:txBody>
+      </p:sp>
+      <p:sp>
+        <p:nvSpPr>
+          <p:cNvPr id="8" name="TextBox 7"/>
+          <p:cNvSpPr txBox="1"/>
+          <p:nvPr/>
+        </p:nvSpPr>
+        <p:spPr>
+          <a:xfrm>
+            <a:off x="685800" y="1880000"/>
+            <a:ext cx="9000000" cy="900000"/>
+          </a:xfrm>
+          <a:prstGeom prst="rect">
+            <a:avLst/>
+          </a:prstGeom>
+          <a:noFill/>
+        </p:spPr>
+        <p:txBody>
+          <a:bodyPr wrap="square" lIns="0" rIns="0" tIns="0" bIns="0">
+            <a:spAutoFit/>
+          </a:bodyPr>
+          <a:lstStyle/>
+          <a:p>
+            <a:pPr algn="l">
+              <a:lnSpc>
+                <a:spcPct val="130000"/>
+              </a:lnSpc>
+              <a:spcBef>
+                <a:spcPts val="0"/>
+              </a:spcBef>
+              <a:spcAft>
+                <a:spcPts val="0"/>
+              </a:spcAft>
+            </a:pPr>
+            <a:r>
+              <a:rPr sz="3600" b="1" lang="ja-JP" altLang="en-US">
+                <a:solidFill>
+                  <a:srgbClr val="FFFFFF"/>
+                </a:solidFill>
+                <a:latin typeface="游ゴシック"/>
+                <a:ea typeface="游ゴシック"/>
+                <a:cs typeface="游ゴシック"/>
+              </a:rPr>
+              <a:t>セットアップ</a:t>
+            </a:r>
+          </a:p>
+        </p:txBody>
+      </p:sp>
+      <p:sp>
+        <p:nvSpPr>
+          <p:cNvPr id="9" name="Rectangle 8"/>
+          <p:cNvSpPr/>
+          <p:nvPr/>
+        </p:nvSpPr>
+        <p:spPr>
+          <a:xfrm>
+            <a:off x="685800" y="2960000"/>
+            <a:ext cx="1400000" cy="45720"/>
+          </a:xfrm>
+          <a:prstGeom prst="rect">
+            <a:avLst/>
+          </a:prstGeom>
+          <a:solidFill>
+            <a:srgbClr val="7FB0FF"/>
+          </a:solidFill>
+          <a:ln>
+            <a:noFill/>
+          </a:ln>
+          <a:effectLst/>
+        </p:spPr>
+        <p:style>
+          <a:lnRef idx="1">
+            <a:schemeClr val="accent1"/>
+          </a:lnRef>
+          <a:fillRef idx="3">
+            <a:schemeClr val="accent1"/>
+          </a:fillRef>
+          <a:effectRef idx="2">
+            <a:schemeClr val="accent1"/>
+          </a:effectRef>
+          <a:fontRef idx="minor">
+            <a:schemeClr val="lt1"/>
+          </a:fontRef>
+        </p:style>
+        <p:txBody>
+          <a:bodyPr rtlCol="0" anchor="ctr"/>
+          <a:lstStyle/>
+          <a:p>
+            <a:pPr algn="ctr"/>
+          </a:p>
+        </p:txBody>
+      </p:sp>
+      <p:sp>
+        <p:nvSpPr>
+          <p:cNvPr id="10" name="TextBox 9"/>
+          <p:cNvSpPr txBox="1"/>
+          <p:nvPr/>
+        </p:nvSpPr>
+        <p:spPr>
+          <a:xfrm>
+            <a:off x="685800" y="3200000"/>
+            <a:ext cx="9000000" cy="420000"/>
+          </a:xfrm>
+          <a:prstGeom prst="rect">
+            <a:avLst/>
+          </a:prstGeom>
+          <a:noFill/>
+        </p:spPr>
+        <p:txBody>
+          <a:bodyPr wrap="square" lIns="0" rIns="0" tIns="0" bIns="0">
+            <a:spAutoFit/>
+          </a:bodyPr>
+          <a:lstStyle/>
+          <a:p>
+            <a:pPr algn="l">
+              <a:lnSpc>
+                <a:spcPct val="130000"/>
+              </a:lnSpc>
+              <a:spcBef>
+                <a:spcPts val="0"/>
+              </a:spcBef>
+              <a:spcAft>
+                <a:spcPts val="0"/>
+              </a:spcAft>
+            </a:pPr>
+            <a:r>
+              <a:rPr sz="1600" b="0" lang="ja-JP" altLang="en-US">
+                <a:solidFill>
+                  <a:srgbClr val="D8DDE5"/>
+                </a:solidFill>
+                <a:latin typeface="游ゴシック"/>
+                <a:ea typeface="游ゴシック"/>
+                <a:cs typeface="游ゴシック"/>
+              </a:rPr>
+              <a:t>アプリを起動し、AI接続を設定します。</a:t>
+            </a:r>
+          </a:p>
+        </p:txBody>
+      </p:sp>
+      <p:sp>
+        <p:nvSpPr>
+          <p:cNvPr id="11" name="TextBox 10"/>
+          <p:cNvSpPr txBox="1"/>
+          <p:nvPr/>
+        </p:nvSpPr>
+        <p:spPr>
+          <a:xfrm>
+            <a:off x="685800" y="3800000"/>
+            <a:ext cx="9000000" cy="300000"/>
+          </a:xfrm>
+          <a:prstGeom prst="rect">
+            <a:avLst/>
+          </a:prstGeom>
+          <a:noFill/>
+        </p:spPr>
+        <p:txBody>
+          <a:bodyPr wrap="square" lIns="0" rIns="0" tIns="0" bIns="0">
+            <a:spAutoFit/>
+          </a:bodyPr>
+          <a:lstStyle/>
+          <a:p>
+            <a:pPr algn="l">
+              <a:lnSpc>
+                <a:spcPct val="130000"/>
+              </a:lnSpc>
+              <a:spcBef>
+                <a:spcPts val="0"/>
+              </a:spcBef>
+              <a:spcAft>
+                <a:spcPts val="0"/>
+              </a:spcAft>
+            </a:pPr>
+            <a:r>
+              <a:rPr sz="1100" b="1" lang="ja-JP" altLang="en-US">
+                <a:solidFill>
+                  <a:srgbClr val="9CB3D9"/>
+                </a:solidFill>
+                <a:latin typeface="游ゴシック"/>
+                <a:ea typeface="游ゴシック"/>
+                <a:cs typeface="游ゴシック"/>
+              </a:rPr>
+              <a:t>このパートに含まれる手順</a:t>
+            </a:r>
+          </a:p>
+        </p:txBody>
+      </p:sp>
+      <p:sp>
+        <p:nvSpPr>
+          <p:cNvPr id="12" name="TextBox 11"/>
+          <p:cNvSpPr txBox="1"/>
+          <p:nvPr/>
+        </p:nvSpPr>
+        <p:spPr>
+          <a:xfrm>
+            <a:off x="685800" y="4160000"/>
+            <a:ext cx="9000000" cy="800000"/>
+          </a:xfrm>
+          <a:prstGeom prst="rect">
+            <a:avLst/>
+          </a:prstGeom>
+          <a:noFill/>
+        </p:spPr>
+        <p:txBody>
+          <a:bodyPr wrap="square" lIns="0" rIns="0" tIns="0" bIns="0">
+            <a:spAutoFit/>
+          </a:bodyPr>
+          <a:lstStyle/>
+          <a:p>
+            <a:pPr algn="l">
+              <a:lnSpc>
+                <a:spcPct val="130000"/>
+              </a:lnSpc>
+              <a:spcBef>
+                <a:spcPts val="0"/>
+              </a:spcBef>
+              <a:spcAft>
+                <a:spcPts val="600"/>
+              </a:spcAft>
+            </a:pPr>
+            <a:r>
+              <a:rPr sz="1400" b="0" lang="ja-JP" altLang="en-US">
+                <a:solidFill>
+                  <a:srgbClr val="FFFFFF"/>
+                </a:solidFill>
+                <a:latin typeface="游ゴシック"/>
+                <a:ea typeface="游ゴシック"/>
+                <a:cs typeface="游ゴシック"/>
+              </a:rPr>
+              <a:t>STEP 1　起動する</a:t>
+            </a:r>
+          </a:p>
+          <a:p>
+            <a:pPr algn="l">
+              <a:lnSpc>
+                <a:spcPct val="130000"/>
+              </a:lnSpc>
+              <a:spcBef>
+                <a:spcPts val="0"/>
+              </a:spcBef>
+              <a:spcAft>
+                <a:spcPts val="600"/>
+              </a:spcAft>
+            </a:pPr>
+            <a:r>
+              <a:rPr sz="1400" b="0" lang="ja-JP" altLang="en-US">
+                <a:solidFill>
+                  <a:srgbClr val="FFFFFF"/>
+                </a:solidFill>
+                <a:latin typeface="游ゴシック"/>
+                <a:ea typeface="游ゴシック"/>
+                <a:cs typeface="游ゴシック"/>
+              </a:rPr>
+              <a:t>STEP 2　初期設定</a:t>
+            </a:r>
+          </a:p>
+        </p:txBody>
+      </p:sp>
+      <p:sp>
+        <p:nvSpPr>
+          <p:cNvPr id="13" name="Rounded Rectangle 12"/>
+          <p:cNvSpPr/>
+          <p:nvPr/>
+        </p:nvSpPr>
+        <p:spPr>
+          <a:xfrm>
+            <a:off x="685800" y="5150000"/>
+            <a:ext cx="8200000" cy="720000"/>
+          </a:xfrm>
+          <a:prstGeom prst="roundRect">
+            <a:avLst>
+              <a:gd name="adj" fmla="val 8000"/>
+            </a:avLst>
+          </a:prstGeom>
+          <a:solidFill>
+            <a:srgbClr val="2A4A7F"/>
+          </a:solidFill>
+          <a:ln w="9525">
+            <a:solidFill>
+              <a:srgbClr val="7FB0FF"/>
+            </a:solidFill>
+          </a:ln>
+          <a:effectLst/>
+        </p:spPr>
+        <p:style>
+          <a:lnRef idx="1">
+            <a:schemeClr val="accent1"/>
+          </a:lnRef>
+          <a:fillRef idx="3">
+            <a:schemeClr val="accent1"/>
+          </a:fillRef>
+          <a:effectRef idx="2">
+            <a:schemeClr val="accent1"/>
+          </a:effectRef>
+          <a:fontRef idx="minor">
+            <a:schemeClr val="lt1"/>
+          </a:fontRef>
+        </p:style>
+        <p:txBody>
+          <a:bodyPr rtlCol="0" anchor="ctr" wrap="square"/>
+          <a:lstStyle/>
+          <a:p>
+            <a:pPr algn="l"/>
+            <a:r>
+              <a:rPr sz="1300" b="1" lang="ja-JP" altLang="en-US">
+                <a:solidFill>
+                  <a:srgbClr val="7FB0FF"/>
+                </a:solidFill>
+                <a:latin typeface="游ゴシック"/>
+                <a:ea typeface="游ゴシック"/>
+                <a:cs typeface="游ゴシック"/>
+              </a:rPr>
+              <a:t>ゴール　</a:t>
+            </a:r>
+            <a:r>
+              <a:rPr sz="1300" b="0" lang="ja-JP" altLang="en-US">
+                <a:solidFill>
+                  <a:srgbClr val="FFFFFF"/>
+                </a:solidFill>
+                <a:latin typeface="游ゴシック"/>
+                <a:ea typeface="游ゴシック"/>
+                <a:cs typeface="游ゴシック"/>
+              </a:rPr>
+              <a:t>このパートが終わると、アプリの初期設定は完了です。</a:t>
+            </a:r>
+          </a:p>
+        </p:txBody>
+      </p:sp>
+      <p:sp>
+        <p:nvSpPr>
+          <p:cNvPr id="14" name="TextBox 13"/>
+          <p:cNvSpPr txBox="1"/>
+          <p:nvPr/>
+        </p:nvSpPr>
+        <p:spPr>
+          <a:xfrm>
+            <a:off x="685800" y="6280000"/>
+            <a:ext cx="5000000" cy="260000"/>
+          </a:xfrm>
+          <a:prstGeom prst="rect">
+            <a:avLst/>
+          </a:prstGeom>
+          <a:noFill/>
+        </p:spPr>
+        <p:txBody>
+          <a:bodyPr wrap="square" lIns="0" rIns="0" tIns="0" bIns="0">
+            <a:spAutoFit/>
+          </a:bodyPr>
+          <a:lstStyle/>
+          <a:p>
+            <a:pPr algn="l">
+              <a:lnSpc>
+                <a:spcPct val="130000"/>
+              </a:lnSpc>
+              <a:spcBef>
+                <a:spcPts val="0"/>
+              </a:spcBef>
+              <a:spcAft>
+                <a:spcPts val="0"/>
+              </a:spcAft>
+            </a:pPr>
+            <a:r>
+              <a:rPr sz="900" b="0" lang="ja-JP" altLang="en-US">
+                <a:solidFill>
+                  <a:srgbClr val="9CB3D9"/>
+                </a:solidFill>
+                <a:latin typeface="游ゴシック"/>
+                <a:ea typeface="游ゴシック"/>
+                <a:cs typeface="游ゴシック"/>
+              </a:rPr>
+              <a:t>ミチナリ ユーザ手順書</a:t>
+            </a:r>
+          </a:p>
+        </p:txBody>
+      </p:sp>
+      <p:sp>
+        <p:nvSpPr>
+          <p:cNvPr id="15" name="TextBox 14"/>
+          <p:cNvSpPr txBox="1"/>
+          <p:nvPr/>
+        </p:nvSpPr>
+        <p:spPr>
+          <a:xfrm>
+            <a:off x="9506200" y="6280000"/>
+            <a:ext cx="2000000" cy="260000"/>
+          </a:xfrm>
+          <a:prstGeom prst="rect">
+            <a:avLst/>
+          </a:prstGeom>
+          <a:noFill/>
+        </p:spPr>
+        <p:txBody>
+          <a:bodyPr wrap="square" lIns="0" rIns="0" tIns="0" bIns="0">
+            <a:spAutoFit/>
+          </a:bodyPr>
+          <a:lstStyle/>
+          <a:p>
+            <a:pPr algn="r">
+              <a:lnSpc>
+                <a:spcPct val="130000"/>
+              </a:lnSpc>
+              <a:spcBef>
+                <a:spcPts val="0"/>
+              </a:spcBef>
+              <a:spcAft>
+                <a:spcPts val="0"/>
+              </a:spcAft>
+            </a:pPr>
+            <a:r>
+              <a:rPr sz="900" b="0" lang="ja-JP" altLang="en-US">
+                <a:solidFill>
+                  <a:srgbClr val="9CB3D9"/>
+                </a:solidFill>
+                <a:latin typeface="游ゴシック"/>
+                <a:ea typeface="游ゴシック"/>
+                <a:cs typeface="游ゴシック"/>
+              </a:rPr>
+              <a:t>3 / 27</a:t>
+            </a:r>
+          </a:p>
+        </p:txBody>
+      </p:sp>
+    </p:spTree>
+  </p:cSld>
+  <p:clrMapOvr>
+    <a:masterClrMapping/>
+  </p:clrMapOvr>
+</p:sld>
+</file>
+
+<file path=ppt/slides/slide25.xml><?xml version="1.0" encoding="utf-8"?>
+<p:sld xmlns:a="http://schemas.openxmlformats.org/drawingml/2006/main" xmlns:p="http://schemas.openxmlformats.org/presentationml/2006/main" xmlns:r="http://schemas.openxmlformats.org/officeDocument/2006/relationships">
+  <p:cSld>
+    <p:spTree>
+      <p:nvGrpSpPr>
+        <p:cNvPr id="1" name=""/>
+        <p:cNvGrpSpPr/>
+        <p:nvPr/>
+      </p:nvGrpSpPr>
+      <p:grpSpPr/>
+      <p:sp>
+        <p:nvSpPr>
+          <p:cNvPr id="2" name="Rectangle 1"/>
+          <p:cNvSpPr/>
+          <p:nvPr/>
+        </p:nvSpPr>
+        <p:spPr>
+          <a:xfrm>
+            <a:off x="0" y="0"/>
+            <a:ext cx="12192000" cy="6858000"/>
+          </a:xfrm>
+          <a:prstGeom prst="rect">
+            <a:avLst/>
+          </a:prstGeom>
+          <a:solidFill>
+            <a:srgbClr val="1F3864"/>
+          </a:solidFill>
+          <a:ln>
+            <a:noFill/>
+          </a:ln>
+          <a:effectLst/>
+        </p:spPr>
+        <p:style>
+          <a:lnRef idx="1">
+            <a:schemeClr val="accent1"/>
+          </a:lnRef>
+          <a:fillRef idx="3">
+            <a:schemeClr val="accent1"/>
+          </a:fillRef>
+          <a:effectRef idx="2">
+            <a:schemeClr val="accent1"/>
+          </a:effectRef>
+          <a:fontRef idx="minor">
+            <a:schemeClr val="lt1"/>
+          </a:fontRef>
+        </p:style>
+        <p:txBody>
+          <a:bodyPr rtlCol="0" anchor="ctr"/>
+          <a:lstStyle/>
+          <a:p>
+            <a:pPr algn="ctr"/>
+          </a:p>
+        </p:txBody>
+      </p:sp>
+      <p:sp>
+        <p:nvSpPr>
+          <p:cNvPr id="3" name="Rounded Rectangle 2"/>
+          <p:cNvSpPr/>
+          <p:nvPr/>
+        </p:nvSpPr>
+        <p:spPr>
+          <a:xfrm>
+            <a:off x="5726200" y="1400000"/>
+            <a:ext cx="1400000" cy="380000"/>
+          </a:xfrm>
+          <a:prstGeom prst="roundRect">
+            <a:avLst>
+              <a:gd name="adj" fmla="val 40000"/>
+            </a:avLst>
+          </a:prstGeom>
+          <a:solidFill>
+            <a:srgbClr val="2A4A7F"/>
+          </a:solidFill>
+          <a:ln>
+            <a:noFill/>
+          </a:ln>
+          <a:effectLst/>
+        </p:spPr>
+        <p:style>
+          <a:lnRef idx="1">
+            <a:schemeClr val="accent1"/>
+          </a:lnRef>
+          <a:fillRef idx="3">
+            <a:schemeClr val="accent1"/>
+          </a:fillRef>
+          <a:effectRef idx="2">
+            <a:schemeClr val="accent1"/>
+          </a:effectRef>
+          <a:fontRef idx="minor">
+            <a:schemeClr val="lt1"/>
+          </a:fontRef>
+        </p:style>
+        <p:txBody>
+          <a:bodyPr rtlCol="0" anchor="ctr" wrap="none" lIns="0" rIns="0"/>
+          <a:lstStyle/>
+          <a:p>
+            <a:pPr algn="ctr"/>
+            <a:r>
+              <a:rPr sz="1000" b="0" lang="ja-JP" altLang="en-US">
+                <a:solidFill>
+                  <a:srgbClr val="9CB3D9"/>
+                </a:solidFill>
+                <a:latin typeface="游ゴシック"/>
+                <a:ea typeface="游ゴシック"/>
+                <a:cs typeface="游ゴシック"/>
+              </a:rPr>
+              <a:t>1 セットアップ</a:t>
+            </a:r>
+          </a:p>
+        </p:txBody>
+      </p:sp>
+      <p:sp>
+        <p:nvSpPr>
+          <p:cNvPr id="4" name="Rounded Rectangle 3"/>
+          <p:cNvSpPr/>
+          <p:nvPr/>
+        </p:nvSpPr>
+        <p:spPr>
+          <a:xfrm>
+            <a:off x="7186200" y="1400000"/>
+            <a:ext cx="1400000" cy="380000"/>
+          </a:xfrm>
+          <a:prstGeom prst="roundRect">
+            <a:avLst>
+              <a:gd name="adj" fmla="val 40000"/>
+            </a:avLst>
+          </a:prstGeom>
+          <a:solidFill>
+            <a:srgbClr val="7FB0FF"/>
+          </a:solidFill>
+          <a:ln>
+            <a:noFill/>
+          </a:ln>
+          <a:effectLst/>
+        </p:spPr>
+        <p:style>
+          <a:lnRef idx="1">
+            <a:schemeClr val="accent1"/>
+          </a:lnRef>
+          <a:fillRef idx="3">
+            <a:schemeClr val="accent1"/>
+          </a:fillRef>
+          <a:effectRef idx="2">
+            <a:schemeClr val="accent1"/>
+          </a:effectRef>
+          <a:fontRef idx="minor">
+            <a:schemeClr val="lt1"/>
+          </a:fontRef>
+        </p:style>
+        <p:txBody>
+          <a:bodyPr rtlCol="0" anchor="ctr" wrap="none" lIns="0" rIns="0"/>
+          <a:lstStyle/>
+          <a:p>
+            <a:pPr algn="ctr"/>
+            <a:r>
+              <a:rPr sz="1000" b="1" lang="ja-JP" altLang="en-US">
+                <a:solidFill>
+                  <a:srgbClr val="1F3864"/>
+                </a:solidFill>
+                <a:latin typeface="游ゴシック"/>
+                <a:ea typeface="游ゴシック"/>
+                <a:cs typeface="游ゴシック"/>
+              </a:rPr>
+              <a:t>2 目標をつくる</a:t>
+            </a:r>
+          </a:p>
+        </p:txBody>
+      </p:sp>
+      <p:sp>
+        <p:nvSpPr>
+          <p:cNvPr id="5" name="Rounded Rectangle 4"/>
+          <p:cNvSpPr/>
+          <p:nvPr/>
+        </p:nvSpPr>
+        <p:spPr>
+          <a:xfrm>
+            <a:off x="8646200" y="1400000"/>
+            <a:ext cx="1400000" cy="380000"/>
+          </a:xfrm>
+          <a:prstGeom prst="roundRect">
+            <a:avLst>
+              <a:gd name="adj" fmla="val 40000"/>
+            </a:avLst>
+          </a:prstGeom>
+          <a:solidFill>
+            <a:srgbClr val="2A4A7F"/>
+          </a:solidFill>
+          <a:ln>
+            <a:noFill/>
+          </a:ln>
+          <a:effectLst/>
+        </p:spPr>
+        <p:style>
+          <a:lnRef idx="1">
+            <a:schemeClr val="accent1"/>
+          </a:lnRef>
+          <a:fillRef idx="3">
+            <a:schemeClr val="accent1"/>
+          </a:fillRef>
+          <a:effectRef idx="2">
+            <a:schemeClr val="accent1"/>
+          </a:effectRef>
+          <a:fontRef idx="minor">
+            <a:schemeClr val="lt1"/>
+          </a:fontRef>
+        </p:style>
+        <p:txBody>
+          <a:bodyPr rtlCol="0" anchor="ctr" wrap="none" lIns="0" rIns="0"/>
+          <a:lstStyle/>
+          <a:p>
+            <a:pPr algn="ctr"/>
+            <a:r>
+              <a:rPr sz="1000" b="0" lang="ja-JP" altLang="en-US">
+                <a:solidFill>
+                  <a:srgbClr val="9CB3D9"/>
+                </a:solidFill>
+                <a:latin typeface="游ゴシック"/>
+                <a:ea typeface="游ゴシック"/>
+                <a:cs typeface="游ゴシック"/>
+              </a:rPr>
+              <a:t>3 毎日つかう</a:t>
+            </a:r>
+          </a:p>
+        </p:txBody>
+      </p:sp>
+      <p:sp>
+        <p:nvSpPr>
+          <p:cNvPr id="6" name="Rounded Rectangle 5"/>
+          <p:cNvSpPr/>
+          <p:nvPr/>
+        </p:nvSpPr>
+        <p:spPr>
+          <a:xfrm>
+            <a:off x="10106200" y="1400000"/>
+            <a:ext cx="1400000" cy="380000"/>
+          </a:xfrm>
+          <a:prstGeom prst="roundRect">
+            <a:avLst>
+              <a:gd name="adj" fmla="val 40000"/>
+            </a:avLst>
+          </a:prstGeom>
+          <a:solidFill>
+            <a:srgbClr val="2A4A7F"/>
+          </a:solidFill>
+          <a:ln>
+            <a:noFill/>
+          </a:ln>
+          <a:effectLst/>
+        </p:spPr>
+        <p:style>
+          <a:lnRef idx="1">
+            <a:schemeClr val="accent1"/>
+          </a:lnRef>
+          <a:fillRef idx="3">
+            <a:schemeClr val="accent1"/>
+          </a:fillRef>
+          <a:effectRef idx="2">
+            <a:schemeClr val="accent1"/>
+          </a:effectRef>
+          <a:fontRef idx="minor">
+            <a:schemeClr val="lt1"/>
+          </a:fontRef>
+        </p:style>
+        <p:txBody>
+          <a:bodyPr rtlCol="0" anchor="ctr" wrap="none" lIns="0" rIns="0"/>
+          <a:lstStyle/>
+          <a:p>
+            <a:pPr algn="ctr"/>
+            <a:r>
+              <a:rPr sz="1000" b="0" lang="ja-JP" altLang="en-US">
+                <a:solidFill>
+                  <a:srgbClr val="9CB3D9"/>
+                </a:solidFill>
+                <a:latin typeface="游ゴシック"/>
+                <a:ea typeface="游ゴシック"/>
+                <a:cs typeface="游ゴシック"/>
+              </a:rPr>
+              <a:t>4 整理する</a:t>
+            </a:r>
+          </a:p>
+        </p:txBody>
+      </p:sp>
+      <p:sp>
+        <p:nvSpPr>
+          <p:cNvPr id="7" name="TextBox 6"/>
+          <p:cNvSpPr txBox="1"/>
+          <p:nvPr/>
+        </p:nvSpPr>
+        <p:spPr>
+          <a:xfrm>
+            <a:off x="685800" y="1400000"/>
+            <a:ext cx="4000000" cy="380000"/>
+          </a:xfrm>
+          <a:prstGeom prst="rect">
+            <a:avLst/>
+          </a:prstGeom>
+          <a:noFill/>
+        </p:spPr>
+        <p:txBody>
+          <a:bodyPr wrap="square" lIns="0" rIns="0" tIns="0" bIns="0">
+            <a:spAutoFit/>
+          </a:bodyPr>
+          <a:lstStyle/>
+          <a:p>
+            <a:pPr algn="l">
+              <a:lnSpc>
+                <a:spcPct val="130000"/>
+              </a:lnSpc>
+              <a:spcBef>
+                <a:spcPts val="0"/>
+              </a:spcBef>
+              <a:spcAft>
+                <a:spcPts val="0"/>
+              </a:spcAft>
+            </a:pPr>
+            <a:r>
+              <a:rPr sz="1400" b="1" lang="ja-JP" altLang="en-US">
+                <a:solidFill>
+                  <a:srgbClr val="7FB0FF"/>
+                </a:solidFill>
+                <a:latin typeface="游ゴシック"/>
+                <a:ea typeface="游ゴシック"/>
+                <a:cs typeface="游ゴシック"/>
+              </a:rPr>
+              <a:t>PART 2</a:t>
+            </a:r>
+          </a:p>
+        </p:txBody>
+      </p:sp>
+      <p:sp>
+        <p:nvSpPr>
+          <p:cNvPr id="8" name="TextBox 7"/>
+          <p:cNvSpPr txBox="1"/>
+          <p:nvPr/>
+        </p:nvSpPr>
+        <p:spPr>
+          <a:xfrm>
+            <a:off x="685800" y="1880000"/>
+            <a:ext cx="9000000" cy="900000"/>
+          </a:xfrm>
+          <a:prstGeom prst="rect">
+            <a:avLst/>
+          </a:prstGeom>
+          <a:noFill/>
+        </p:spPr>
+        <p:txBody>
+          <a:bodyPr wrap="square" lIns="0" rIns="0" tIns="0" bIns="0">
+            <a:spAutoFit/>
+          </a:bodyPr>
+          <a:lstStyle/>
+          <a:p>
+            <a:pPr algn="l">
+              <a:lnSpc>
+                <a:spcPct val="130000"/>
+              </a:lnSpc>
+              <a:spcBef>
+                <a:spcPts val="0"/>
+              </a:spcBef>
+              <a:spcAft>
+                <a:spcPts val="0"/>
+              </a:spcAft>
+            </a:pPr>
+            <a:r>
+              <a:rPr sz="3600" b="1" lang="ja-JP" altLang="en-US">
+                <a:solidFill>
+                  <a:srgbClr val="FFFFFF"/>
+                </a:solidFill>
+                <a:latin typeface="游ゴシック"/>
+                <a:ea typeface="游ゴシック"/>
+                <a:cs typeface="游ゴシック"/>
+              </a:rPr>
+              <a:t>目標をつくる</a:t>
+            </a:r>
+          </a:p>
+        </p:txBody>
+      </p:sp>
+      <p:sp>
+        <p:nvSpPr>
+          <p:cNvPr id="9" name="Rectangle 8"/>
+          <p:cNvSpPr/>
+          <p:nvPr/>
+        </p:nvSpPr>
+        <p:spPr>
+          <a:xfrm>
+            <a:off x="685800" y="2960000"/>
+            <a:ext cx="1400000" cy="45720"/>
+          </a:xfrm>
+          <a:prstGeom prst="rect">
+            <a:avLst/>
+          </a:prstGeom>
+          <a:solidFill>
+            <a:srgbClr val="7FB0FF"/>
+          </a:solidFill>
+          <a:ln>
+            <a:noFill/>
+          </a:ln>
+          <a:effectLst/>
+        </p:spPr>
+        <p:style>
+          <a:lnRef idx="1">
+            <a:schemeClr val="accent1"/>
+          </a:lnRef>
+          <a:fillRef idx="3">
+            <a:schemeClr val="accent1"/>
+          </a:fillRef>
+          <a:effectRef idx="2">
+            <a:schemeClr val="accent1"/>
+          </a:effectRef>
+          <a:fontRef idx="minor">
+            <a:schemeClr val="lt1"/>
+          </a:fontRef>
+        </p:style>
+        <p:txBody>
+          <a:bodyPr rtlCol="0" anchor="ctr"/>
+          <a:lstStyle/>
+          <a:p>
+            <a:pPr algn="ctr"/>
+          </a:p>
+        </p:txBody>
+      </p:sp>
+      <p:sp>
+        <p:nvSpPr>
+          <p:cNvPr id="10" name="TextBox 9"/>
+          <p:cNvSpPr txBox="1"/>
+          <p:nvPr/>
+        </p:nvSpPr>
+        <p:spPr>
+          <a:xfrm>
+            <a:off x="685800" y="3200000"/>
+            <a:ext cx="9000000" cy="420000"/>
+          </a:xfrm>
+          <a:prstGeom prst="rect">
+            <a:avLst/>
+          </a:prstGeom>
+          <a:noFill/>
+        </p:spPr>
+        <p:txBody>
+          <a:bodyPr wrap="square" lIns="0" rIns="0" tIns="0" bIns="0">
+            <a:spAutoFit/>
+          </a:bodyPr>
+          <a:lstStyle/>
+          <a:p>
+            <a:pPr algn="l">
+              <a:lnSpc>
+                <a:spcPct val="130000"/>
+              </a:lnSpc>
+              <a:spcBef>
+                <a:spcPts val="0"/>
+              </a:spcBef>
+              <a:spcAft>
+                <a:spcPts val="0"/>
+              </a:spcAft>
+            </a:pPr>
+            <a:r>
+              <a:rPr sz="1600" b="0" lang="ja-JP" altLang="en-US">
+                <a:solidFill>
+                  <a:srgbClr val="D8DDE5"/>
+                </a:solidFill>
+                <a:latin typeface="游ゴシック"/>
+                <a:ea typeface="游ゴシック"/>
+                <a:cs typeface="游ゴシック"/>
+              </a:rPr>
+              <a:t>学習する目標を登録し、科目・教材・時間配分を整えます。</a:t>
+            </a:r>
+          </a:p>
+        </p:txBody>
+      </p:sp>
+      <p:sp>
+        <p:nvSpPr>
+          <p:cNvPr id="11" name="TextBox 10"/>
+          <p:cNvSpPr txBox="1"/>
+          <p:nvPr/>
+        </p:nvSpPr>
+        <p:spPr>
+          <a:xfrm>
+            <a:off x="685800" y="3800000"/>
+            <a:ext cx="9000000" cy="300000"/>
+          </a:xfrm>
+          <a:prstGeom prst="rect">
+            <a:avLst/>
+          </a:prstGeom>
+          <a:noFill/>
+        </p:spPr>
+        <p:txBody>
+          <a:bodyPr wrap="square" lIns="0" rIns="0" tIns="0" bIns="0">
+            <a:spAutoFit/>
+          </a:bodyPr>
+          <a:lstStyle/>
+          <a:p>
+            <a:pPr algn="l">
+              <a:lnSpc>
+                <a:spcPct val="130000"/>
+              </a:lnSpc>
+              <a:spcBef>
+                <a:spcPts val="0"/>
+              </a:spcBef>
+              <a:spcAft>
+                <a:spcPts val="0"/>
+              </a:spcAft>
+            </a:pPr>
+            <a:r>
+              <a:rPr sz="1100" b="1" lang="ja-JP" altLang="en-US">
+                <a:solidFill>
+                  <a:srgbClr val="9CB3D9"/>
+                </a:solidFill>
+                <a:latin typeface="游ゴシック"/>
+                <a:ea typeface="游ゴシック"/>
+                <a:cs typeface="游ゴシック"/>
+              </a:rPr>
+              <a:t>このパートに含まれる手順</a:t>
+            </a:r>
+          </a:p>
+        </p:txBody>
+      </p:sp>
+      <p:sp>
+        <p:nvSpPr>
+          <p:cNvPr id="12" name="TextBox 11"/>
+          <p:cNvSpPr txBox="1"/>
+          <p:nvPr/>
+        </p:nvSpPr>
+        <p:spPr>
+          <a:xfrm>
+            <a:off x="685800" y="4160000"/>
+            <a:ext cx="9000000" cy="800000"/>
+          </a:xfrm>
+          <a:prstGeom prst="rect">
+            <a:avLst/>
+          </a:prstGeom>
+          <a:noFill/>
+        </p:spPr>
+        <p:txBody>
+          <a:bodyPr wrap="square" lIns="0" rIns="0" tIns="0" bIns="0">
+            <a:spAutoFit/>
+          </a:bodyPr>
+          <a:lstStyle/>
+          <a:p>
+            <a:pPr algn="l">
+              <a:lnSpc>
+                <a:spcPct val="130000"/>
+              </a:lnSpc>
+              <a:spcBef>
+                <a:spcPts val="0"/>
+              </a:spcBef>
+              <a:spcAft>
+                <a:spcPts val="600"/>
+              </a:spcAft>
+            </a:pPr>
+            <a:r>
+              <a:rPr sz="1400" b="0" lang="ja-JP" altLang="en-US">
+                <a:solidFill>
+                  <a:srgbClr val="FFFFFF"/>
+                </a:solidFill>
+                <a:latin typeface="游ゴシック"/>
+                <a:ea typeface="游ゴシック"/>
+                <a:cs typeface="游ゴシック"/>
+              </a:rPr>
+              <a:t>STEP 3　目標をつくる</a:t>
+            </a:r>
+          </a:p>
+          <a:p>
+            <a:pPr algn="l">
+              <a:lnSpc>
+                <a:spcPct val="130000"/>
+              </a:lnSpc>
+              <a:spcBef>
+                <a:spcPts val="0"/>
+              </a:spcBef>
+              <a:spcAft>
+                <a:spcPts val="600"/>
+              </a:spcAft>
+            </a:pPr>
+            <a:r>
+              <a:rPr sz="1400" b="0" lang="ja-JP" altLang="en-US">
+                <a:solidFill>
+                  <a:srgbClr val="FFFFFF"/>
+                </a:solidFill>
+                <a:latin typeface="游ゴシック"/>
+                <a:ea typeface="游ゴシック"/>
+                <a:cs typeface="游ゴシック"/>
+              </a:rPr>
+              <a:t>STEP 4　目標の中身を整える</a:t>
+            </a:r>
+          </a:p>
+        </p:txBody>
+      </p:sp>
+      <p:sp>
+        <p:nvSpPr>
+          <p:cNvPr id="13" name="Rounded Rectangle 12"/>
+          <p:cNvSpPr/>
+          <p:nvPr/>
+        </p:nvSpPr>
+        <p:spPr>
+          <a:xfrm>
+            <a:off x="685800" y="5150000"/>
+            <a:ext cx="8200000" cy="720000"/>
+          </a:xfrm>
+          <a:prstGeom prst="roundRect">
+            <a:avLst>
+              <a:gd name="adj" fmla="val 8000"/>
+            </a:avLst>
+          </a:prstGeom>
+          <a:solidFill>
+            <a:srgbClr val="2A4A7F"/>
+          </a:solidFill>
+          <a:ln w="9525">
+            <a:solidFill>
+              <a:srgbClr val="7FB0FF"/>
+            </a:solidFill>
+          </a:ln>
+          <a:effectLst/>
+        </p:spPr>
+        <p:style>
+          <a:lnRef idx="1">
+            <a:schemeClr val="accent1"/>
+          </a:lnRef>
+          <a:fillRef idx="3">
+            <a:schemeClr val="accent1"/>
+          </a:fillRef>
+          <a:effectRef idx="2">
+            <a:schemeClr val="accent1"/>
+          </a:effectRef>
+          <a:fontRef idx="minor">
+            <a:schemeClr val="lt1"/>
+          </a:fontRef>
+        </p:style>
+        <p:txBody>
+          <a:bodyPr rtlCol="0" anchor="ctr" wrap="square"/>
+          <a:lstStyle/>
+          <a:p>
+            <a:pPr algn="l"/>
+            <a:r>
+              <a:rPr sz="1300" b="1" lang="ja-JP" altLang="en-US">
+                <a:solidFill>
+                  <a:srgbClr val="7FB0FF"/>
+                </a:solidFill>
+                <a:latin typeface="游ゴシック"/>
+                <a:ea typeface="游ゴシック"/>
+                <a:cs typeface="游ゴシック"/>
+              </a:rPr>
+              <a:t>ゴール　</a:t>
+            </a:r>
+            <a:r>
+              <a:rPr sz="1300" b="0" lang="ja-JP" altLang="en-US">
+                <a:solidFill>
+                  <a:srgbClr val="FFFFFF"/>
+                </a:solidFill>
+                <a:latin typeface="游ゴシック"/>
+                <a:ea typeface="游ゴシック"/>
+                <a:cs typeface="游ゴシック"/>
+              </a:rPr>
+              <a:t>このパートが終わると、日々のノルマが自動で算出されるようになります。</a:t>
+            </a:r>
+          </a:p>
+        </p:txBody>
+      </p:sp>
+      <p:sp>
+        <p:nvSpPr>
+          <p:cNvPr id="14" name="TextBox 13"/>
+          <p:cNvSpPr txBox="1"/>
+          <p:nvPr/>
+        </p:nvSpPr>
+        <p:spPr>
+          <a:xfrm>
+            <a:off x="685800" y="6280000"/>
+            <a:ext cx="5000000" cy="260000"/>
+          </a:xfrm>
+          <a:prstGeom prst="rect">
+            <a:avLst/>
+          </a:prstGeom>
+          <a:noFill/>
+        </p:spPr>
+        <p:txBody>
+          <a:bodyPr wrap="square" lIns="0" rIns="0" tIns="0" bIns="0">
+            <a:spAutoFit/>
+          </a:bodyPr>
+          <a:lstStyle/>
+          <a:p>
+            <a:pPr algn="l">
+              <a:lnSpc>
+                <a:spcPct val="130000"/>
+              </a:lnSpc>
+              <a:spcBef>
+                <a:spcPts val="0"/>
+              </a:spcBef>
+              <a:spcAft>
+                <a:spcPts val="0"/>
+              </a:spcAft>
+            </a:pPr>
+            <a:r>
+              <a:rPr sz="900" b="0" lang="ja-JP" altLang="en-US">
+                <a:solidFill>
+                  <a:srgbClr val="9CB3D9"/>
+                </a:solidFill>
+                <a:latin typeface="游ゴシック"/>
+                <a:ea typeface="游ゴシック"/>
+                <a:cs typeface="游ゴシック"/>
+              </a:rPr>
+              <a:t>ミチナリ ユーザ手順書</a:t>
+            </a:r>
+          </a:p>
+        </p:txBody>
+      </p:sp>
+      <p:sp>
+        <p:nvSpPr>
+          <p:cNvPr id="15" name="TextBox 14"/>
+          <p:cNvSpPr txBox="1"/>
+          <p:nvPr/>
+        </p:nvSpPr>
+        <p:spPr>
+          <a:xfrm>
+            <a:off x="9506200" y="6280000"/>
+            <a:ext cx="2000000" cy="260000"/>
+          </a:xfrm>
+          <a:prstGeom prst="rect">
+            <a:avLst/>
+          </a:prstGeom>
+          <a:noFill/>
+        </p:spPr>
+        <p:txBody>
+          <a:bodyPr wrap="square" lIns="0" rIns="0" tIns="0" bIns="0">
+            <a:spAutoFit/>
+          </a:bodyPr>
+          <a:lstStyle/>
+          <a:p>
+            <a:pPr algn="r">
+              <a:lnSpc>
+                <a:spcPct val="130000"/>
+              </a:lnSpc>
+              <a:spcBef>
+                <a:spcPts val="0"/>
+              </a:spcBef>
+              <a:spcAft>
+                <a:spcPts val="0"/>
+              </a:spcAft>
+            </a:pPr>
+            <a:r>
+              <a:rPr sz="900" b="0" lang="ja-JP" altLang="en-US">
+                <a:solidFill>
+                  <a:srgbClr val="9CB3D9"/>
+                </a:solidFill>
+                <a:latin typeface="游ゴシック"/>
+                <a:ea typeface="游ゴシック"/>
+                <a:cs typeface="游ゴシック"/>
+              </a:rPr>
+              <a:t>7 / 27</a:t>
+            </a:r>
+          </a:p>
+        </p:txBody>
+      </p:sp>
+    </p:spTree>
+  </p:cSld>
+  <p:clrMapOvr>
+    <a:masterClrMapping/>
+  </p:clrMapOvr>
+</p:sld>
+</file>
+
+<file path=ppt/slides/slide26.xml><?xml version="1.0" encoding="utf-8"?>
+<p:sld xmlns:a="http://schemas.openxmlformats.org/drawingml/2006/main" xmlns:p="http://schemas.openxmlformats.org/presentationml/2006/main" xmlns:r="http://schemas.openxmlformats.org/officeDocument/2006/relationships">
+  <p:cSld>
+    <p:spTree>
+      <p:nvGrpSpPr>
+        <p:cNvPr id="1" name=""/>
+        <p:cNvGrpSpPr/>
+        <p:nvPr/>
+      </p:nvGrpSpPr>
+      <p:grpSpPr/>
+      <p:sp>
+        <p:nvSpPr>
+          <p:cNvPr id="2" name="Rectangle 1"/>
+          <p:cNvSpPr/>
+          <p:nvPr/>
+        </p:nvSpPr>
+        <p:spPr>
+          <a:xfrm>
+            <a:off x="0" y="0"/>
+            <a:ext cx="12192000" cy="6858000"/>
+          </a:xfrm>
+          <a:prstGeom prst="rect">
+            <a:avLst/>
+          </a:prstGeom>
+          <a:solidFill>
+            <a:srgbClr val="1F3864"/>
+          </a:solidFill>
+          <a:ln>
+            <a:noFill/>
+          </a:ln>
+          <a:effectLst/>
+        </p:spPr>
+        <p:style>
+          <a:lnRef idx="1">
+            <a:schemeClr val="accent1"/>
+          </a:lnRef>
+          <a:fillRef idx="3">
+            <a:schemeClr val="accent1"/>
+          </a:fillRef>
+          <a:effectRef idx="2">
+            <a:schemeClr val="accent1"/>
+          </a:effectRef>
+          <a:fontRef idx="minor">
+            <a:schemeClr val="lt1"/>
+          </a:fontRef>
+        </p:style>
+        <p:txBody>
+          <a:bodyPr rtlCol="0" anchor="ctr"/>
+          <a:lstStyle/>
+          <a:p>
+            <a:pPr algn="ctr"/>
+          </a:p>
+        </p:txBody>
+      </p:sp>
+      <p:sp>
+        <p:nvSpPr>
+          <p:cNvPr id="3" name="Rounded Rectangle 2"/>
+          <p:cNvSpPr/>
+          <p:nvPr/>
+        </p:nvSpPr>
+        <p:spPr>
+          <a:xfrm>
+            <a:off x="5726200" y="1400000"/>
+            <a:ext cx="1400000" cy="380000"/>
+          </a:xfrm>
+          <a:prstGeom prst="roundRect">
+            <a:avLst>
+              <a:gd name="adj" fmla="val 40000"/>
+            </a:avLst>
+          </a:prstGeom>
+          <a:solidFill>
+            <a:srgbClr val="2A4A7F"/>
+          </a:solidFill>
+          <a:ln>
+            <a:noFill/>
+          </a:ln>
+          <a:effectLst/>
+        </p:spPr>
+        <p:style>
+          <a:lnRef idx="1">
+            <a:schemeClr val="accent1"/>
+          </a:lnRef>
+          <a:fillRef idx="3">
+            <a:schemeClr val="accent1"/>
+          </a:fillRef>
+          <a:effectRef idx="2">
+            <a:schemeClr val="accent1"/>
+          </a:effectRef>
+          <a:fontRef idx="minor">
+            <a:schemeClr val="lt1"/>
+          </a:fontRef>
+        </p:style>
+        <p:txBody>
+          <a:bodyPr rtlCol="0" anchor="ctr" wrap="none" lIns="0" rIns="0"/>
+          <a:lstStyle/>
+          <a:p>
+            <a:pPr algn="ctr"/>
+            <a:r>
+              <a:rPr sz="1000" b="0" lang="ja-JP" altLang="en-US">
+                <a:solidFill>
+                  <a:srgbClr val="9CB3D9"/>
+                </a:solidFill>
+                <a:latin typeface="游ゴシック"/>
+                <a:ea typeface="游ゴシック"/>
+                <a:cs typeface="游ゴシック"/>
+              </a:rPr>
+              <a:t>1 セットアップ</a:t>
+            </a:r>
+          </a:p>
+        </p:txBody>
+      </p:sp>
+      <p:sp>
+        <p:nvSpPr>
+          <p:cNvPr id="4" name="Rounded Rectangle 3"/>
+          <p:cNvSpPr/>
+          <p:nvPr/>
+        </p:nvSpPr>
+        <p:spPr>
+          <a:xfrm>
+            <a:off x="7186200" y="1400000"/>
+            <a:ext cx="1400000" cy="380000"/>
+          </a:xfrm>
+          <a:prstGeom prst="roundRect">
+            <a:avLst>
+              <a:gd name="adj" fmla="val 40000"/>
+            </a:avLst>
+          </a:prstGeom>
+          <a:solidFill>
+            <a:srgbClr val="2A4A7F"/>
+          </a:solidFill>
+          <a:ln>
+            <a:noFill/>
+          </a:ln>
+          <a:effectLst/>
+        </p:spPr>
+        <p:style>
+          <a:lnRef idx="1">
+            <a:schemeClr val="accent1"/>
+          </a:lnRef>
+          <a:fillRef idx="3">
+            <a:schemeClr val="accent1"/>
+          </a:fillRef>
+          <a:effectRef idx="2">
+            <a:schemeClr val="accent1"/>
+          </a:effectRef>
+          <a:fontRef idx="minor">
+            <a:schemeClr val="lt1"/>
+          </a:fontRef>
+        </p:style>
+        <p:txBody>
+          <a:bodyPr rtlCol="0" anchor="ctr" wrap="none" lIns="0" rIns="0"/>
+          <a:lstStyle/>
+          <a:p>
+            <a:pPr algn="ctr"/>
+            <a:r>
+              <a:rPr sz="1000" b="0" lang="ja-JP" altLang="en-US">
+                <a:solidFill>
+                  <a:srgbClr val="9CB3D9"/>
+                </a:solidFill>
+                <a:latin typeface="游ゴシック"/>
+                <a:ea typeface="游ゴシック"/>
+                <a:cs typeface="游ゴシック"/>
+              </a:rPr>
+              <a:t>2 目標をつくる</a:t>
+            </a:r>
+          </a:p>
+        </p:txBody>
+      </p:sp>
+      <p:sp>
+        <p:nvSpPr>
+          <p:cNvPr id="5" name="Rounded Rectangle 4"/>
+          <p:cNvSpPr/>
+          <p:nvPr/>
+        </p:nvSpPr>
+        <p:spPr>
+          <a:xfrm>
+            <a:off x="8646200" y="1400000"/>
+            <a:ext cx="1400000" cy="380000"/>
+          </a:xfrm>
+          <a:prstGeom prst="roundRect">
+            <a:avLst>
+              <a:gd name="adj" fmla="val 40000"/>
+            </a:avLst>
+          </a:prstGeom>
+          <a:solidFill>
+            <a:srgbClr val="7FB0FF"/>
+          </a:solidFill>
+          <a:ln>
+            <a:noFill/>
+          </a:ln>
+          <a:effectLst/>
+        </p:spPr>
+        <p:style>
+          <a:lnRef idx="1">
+            <a:schemeClr val="accent1"/>
+          </a:lnRef>
+          <a:fillRef idx="3">
+            <a:schemeClr val="accent1"/>
+          </a:fillRef>
+          <a:effectRef idx="2">
+            <a:schemeClr val="accent1"/>
+          </a:effectRef>
+          <a:fontRef idx="minor">
+            <a:schemeClr val="lt1"/>
+          </a:fontRef>
+        </p:style>
+        <p:txBody>
+          <a:bodyPr rtlCol="0" anchor="ctr" wrap="none" lIns="0" rIns="0"/>
+          <a:lstStyle/>
+          <a:p>
+            <a:pPr algn="ctr"/>
+            <a:r>
+              <a:rPr sz="1000" b="1" lang="ja-JP" altLang="en-US">
+                <a:solidFill>
+                  <a:srgbClr val="1F3864"/>
+                </a:solidFill>
+                <a:latin typeface="游ゴシック"/>
+                <a:ea typeface="游ゴシック"/>
+                <a:cs typeface="游ゴシック"/>
+              </a:rPr>
+              <a:t>3 毎日つかう</a:t>
+            </a:r>
+          </a:p>
+        </p:txBody>
+      </p:sp>
+      <p:sp>
+        <p:nvSpPr>
+          <p:cNvPr id="6" name="Rounded Rectangle 5"/>
+          <p:cNvSpPr/>
+          <p:nvPr/>
+        </p:nvSpPr>
+        <p:spPr>
+          <a:xfrm>
+            <a:off x="10106200" y="1400000"/>
+            <a:ext cx="1400000" cy="380000"/>
+          </a:xfrm>
+          <a:prstGeom prst="roundRect">
+            <a:avLst>
+              <a:gd name="adj" fmla="val 40000"/>
+            </a:avLst>
+          </a:prstGeom>
+          <a:solidFill>
+            <a:srgbClr val="2A4A7F"/>
+          </a:solidFill>
+          <a:ln>
+            <a:noFill/>
+          </a:ln>
+          <a:effectLst/>
+        </p:spPr>
+        <p:style>
+          <a:lnRef idx="1">
+            <a:schemeClr val="accent1"/>
+          </a:lnRef>
+          <a:fillRef idx="3">
+            <a:schemeClr val="accent1"/>
+          </a:fillRef>
+          <a:effectRef idx="2">
+            <a:schemeClr val="accent1"/>
+          </a:effectRef>
+          <a:fontRef idx="minor">
+            <a:schemeClr val="lt1"/>
+          </a:fontRef>
+        </p:style>
+        <p:txBody>
+          <a:bodyPr rtlCol="0" anchor="ctr" wrap="none" lIns="0" rIns="0"/>
+          <a:lstStyle/>
+          <a:p>
+            <a:pPr algn="ctr"/>
+            <a:r>
+              <a:rPr sz="1000" b="0" lang="ja-JP" altLang="en-US">
+                <a:solidFill>
+                  <a:srgbClr val="9CB3D9"/>
+                </a:solidFill>
+                <a:latin typeface="游ゴシック"/>
+                <a:ea typeface="游ゴシック"/>
+                <a:cs typeface="游ゴシック"/>
+              </a:rPr>
+              <a:t>4 整理する</a:t>
+            </a:r>
+          </a:p>
+        </p:txBody>
+      </p:sp>
+      <p:sp>
+        <p:nvSpPr>
+          <p:cNvPr id="7" name="TextBox 6"/>
+          <p:cNvSpPr txBox="1"/>
+          <p:nvPr/>
+        </p:nvSpPr>
+        <p:spPr>
+          <a:xfrm>
+            <a:off x="685800" y="1400000"/>
+            <a:ext cx="4000000" cy="380000"/>
+          </a:xfrm>
+          <a:prstGeom prst="rect">
+            <a:avLst/>
+          </a:prstGeom>
+          <a:noFill/>
+        </p:spPr>
+        <p:txBody>
+          <a:bodyPr wrap="square" lIns="0" rIns="0" tIns="0" bIns="0">
+            <a:spAutoFit/>
+          </a:bodyPr>
+          <a:lstStyle/>
+          <a:p>
+            <a:pPr algn="l">
+              <a:lnSpc>
+                <a:spcPct val="130000"/>
+              </a:lnSpc>
+              <a:spcBef>
+                <a:spcPts val="0"/>
+              </a:spcBef>
+              <a:spcAft>
+                <a:spcPts val="0"/>
+              </a:spcAft>
+            </a:pPr>
+            <a:r>
+              <a:rPr sz="1400" b="1" lang="ja-JP" altLang="en-US">
+                <a:solidFill>
+                  <a:srgbClr val="7FB0FF"/>
+                </a:solidFill>
+                <a:latin typeface="游ゴシック"/>
+                <a:ea typeface="游ゴシック"/>
+                <a:cs typeface="游ゴシック"/>
+              </a:rPr>
+              <a:t>PART 3</a:t>
+            </a:r>
+          </a:p>
+        </p:txBody>
+      </p:sp>
+      <p:sp>
+        <p:nvSpPr>
+          <p:cNvPr id="8" name="TextBox 7"/>
+          <p:cNvSpPr txBox="1"/>
+          <p:nvPr/>
+        </p:nvSpPr>
+        <p:spPr>
+          <a:xfrm>
+            <a:off x="685800" y="1880000"/>
+            <a:ext cx="9000000" cy="900000"/>
+          </a:xfrm>
+          <a:prstGeom prst="rect">
+            <a:avLst/>
+          </a:prstGeom>
+          <a:noFill/>
+        </p:spPr>
+        <p:txBody>
+          <a:bodyPr wrap="square" lIns="0" rIns="0" tIns="0" bIns="0">
+            <a:spAutoFit/>
+          </a:bodyPr>
+          <a:lstStyle/>
+          <a:p>
+            <a:pPr algn="l">
+              <a:lnSpc>
+                <a:spcPct val="130000"/>
+              </a:lnSpc>
+              <a:spcBef>
+                <a:spcPts val="0"/>
+              </a:spcBef>
+              <a:spcAft>
+                <a:spcPts val="0"/>
+              </a:spcAft>
+            </a:pPr>
+            <a:r>
+              <a:rPr sz="3600" b="1" lang="ja-JP" altLang="en-US">
+                <a:solidFill>
+                  <a:srgbClr val="FFFFFF"/>
+                </a:solidFill>
+                <a:latin typeface="游ゴシック"/>
+                <a:ea typeface="游ゴシック"/>
+                <a:cs typeface="游ゴシック"/>
+              </a:rPr>
+              <a:t>毎日つかう</a:t>
+            </a:r>
+          </a:p>
+        </p:txBody>
+      </p:sp>
+      <p:sp>
+        <p:nvSpPr>
+          <p:cNvPr id="9" name="Rectangle 8"/>
+          <p:cNvSpPr/>
+          <p:nvPr/>
+        </p:nvSpPr>
+        <p:spPr>
+          <a:xfrm>
+            <a:off x="685800" y="2960000"/>
+            <a:ext cx="1400000" cy="45720"/>
+          </a:xfrm>
+          <a:prstGeom prst="rect">
+            <a:avLst/>
+          </a:prstGeom>
+          <a:solidFill>
+            <a:srgbClr val="7FB0FF"/>
+          </a:solidFill>
+          <a:ln>
+            <a:noFill/>
+          </a:ln>
+          <a:effectLst/>
+        </p:spPr>
+        <p:style>
+          <a:lnRef idx="1">
+            <a:schemeClr val="accent1"/>
+          </a:lnRef>
+          <a:fillRef idx="3">
+            <a:schemeClr val="accent1"/>
+          </a:fillRef>
+          <a:effectRef idx="2">
+            <a:schemeClr val="accent1"/>
+          </a:effectRef>
+          <a:fontRef idx="minor">
+            <a:schemeClr val="lt1"/>
+          </a:fontRef>
+        </p:style>
+        <p:txBody>
+          <a:bodyPr rtlCol="0" anchor="ctr"/>
+          <a:lstStyle/>
+          <a:p>
+            <a:pPr algn="ctr"/>
+          </a:p>
+        </p:txBody>
+      </p:sp>
+      <p:sp>
+        <p:nvSpPr>
+          <p:cNvPr id="10" name="TextBox 9"/>
+          <p:cNvSpPr txBox="1"/>
+          <p:nvPr/>
+        </p:nvSpPr>
+        <p:spPr>
+          <a:xfrm>
+            <a:off x="685800" y="3200000"/>
+            <a:ext cx="9000000" cy="420000"/>
+          </a:xfrm>
+          <a:prstGeom prst="rect">
+            <a:avLst/>
+          </a:prstGeom>
+          <a:noFill/>
+        </p:spPr>
+        <p:txBody>
+          <a:bodyPr wrap="square" lIns="0" rIns="0" tIns="0" bIns="0">
+            <a:spAutoFit/>
+          </a:bodyPr>
+          <a:lstStyle/>
+          <a:p>
+            <a:pPr algn="l">
+              <a:lnSpc>
+                <a:spcPct val="130000"/>
+              </a:lnSpc>
+              <a:spcBef>
+                <a:spcPts val="0"/>
+              </a:spcBef>
+              <a:spcAft>
+                <a:spcPts val="0"/>
+              </a:spcAft>
+            </a:pPr>
+            <a:r>
+              <a:rPr sz="1600" b="0" lang="ja-JP" altLang="en-US">
+                <a:solidFill>
+                  <a:srgbClr val="D8DDE5"/>
+                </a:solidFill>
+                <a:latin typeface="游ゴシック"/>
+                <a:ea typeface="游ゴシック"/>
+                <a:cs typeface="游ゴシック"/>
+              </a:rPr>
+              <a:t>日々の実績を記録し、分析画面でふりかえります。</a:t>
+            </a:r>
+          </a:p>
+        </p:txBody>
+      </p:sp>
+      <p:sp>
+        <p:nvSpPr>
+          <p:cNvPr id="11" name="TextBox 10"/>
+          <p:cNvSpPr txBox="1"/>
+          <p:nvPr/>
+        </p:nvSpPr>
+        <p:spPr>
+          <a:xfrm>
+            <a:off x="685800" y="3800000"/>
+            <a:ext cx="9000000" cy="300000"/>
+          </a:xfrm>
+          <a:prstGeom prst="rect">
+            <a:avLst/>
+          </a:prstGeom>
+          <a:noFill/>
+        </p:spPr>
+        <p:txBody>
+          <a:bodyPr wrap="square" lIns="0" rIns="0" tIns="0" bIns="0">
+            <a:spAutoFit/>
+          </a:bodyPr>
+          <a:lstStyle/>
+          <a:p>
+            <a:pPr algn="l">
+              <a:lnSpc>
+                <a:spcPct val="130000"/>
+              </a:lnSpc>
+              <a:spcBef>
+                <a:spcPts val="0"/>
+              </a:spcBef>
+              <a:spcAft>
+                <a:spcPts val="0"/>
+              </a:spcAft>
+            </a:pPr>
+            <a:r>
+              <a:rPr sz="1100" b="1" lang="ja-JP" altLang="en-US">
+                <a:solidFill>
+                  <a:srgbClr val="9CB3D9"/>
+                </a:solidFill>
+                <a:latin typeface="游ゴシック"/>
+                <a:ea typeface="游ゴシック"/>
+                <a:cs typeface="游ゴシック"/>
+              </a:rPr>
+              <a:t>このパートに含まれる手順</a:t>
+            </a:r>
+          </a:p>
+        </p:txBody>
+      </p:sp>
+      <p:sp>
+        <p:nvSpPr>
+          <p:cNvPr id="12" name="TextBox 11"/>
+          <p:cNvSpPr txBox="1"/>
+          <p:nvPr/>
+        </p:nvSpPr>
+        <p:spPr>
+          <a:xfrm>
+            <a:off x="685800" y="4160000"/>
+            <a:ext cx="9000000" cy="800000"/>
+          </a:xfrm>
+          <a:prstGeom prst="rect">
+            <a:avLst/>
+          </a:prstGeom>
+          <a:noFill/>
+        </p:spPr>
+        <p:txBody>
+          <a:bodyPr wrap="square" lIns="0" rIns="0" tIns="0" bIns="0">
+            <a:spAutoFit/>
+          </a:bodyPr>
+          <a:lstStyle/>
+          <a:p>
+            <a:pPr algn="l">
+              <a:lnSpc>
+                <a:spcPct val="130000"/>
+              </a:lnSpc>
+              <a:spcBef>
+                <a:spcPts val="0"/>
+              </a:spcBef>
+              <a:spcAft>
+                <a:spcPts val="600"/>
+              </a:spcAft>
+            </a:pPr>
+            <a:r>
+              <a:rPr sz="1400" b="0" lang="ja-JP" altLang="en-US">
+                <a:solidFill>
+                  <a:srgbClr val="FFFFFF"/>
+                </a:solidFill>
+                <a:latin typeface="游ゴシック"/>
+                <a:ea typeface="游ゴシック"/>
+                <a:cs typeface="游ゴシック"/>
+              </a:rPr>
+              <a:t>STEP 5　毎日記録する</a:t>
+            </a:r>
+          </a:p>
+          <a:p>
+            <a:pPr algn="l">
+              <a:lnSpc>
+                <a:spcPct val="130000"/>
+              </a:lnSpc>
+              <a:spcBef>
+                <a:spcPts val="0"/>
+              </a:spcBef>
+              <a:spcAft>
+                <a:spcPts val="600"/>
+              </a:spcAft>
+            </a:pPr>
+            <a:r>
+              <a:rPr sz="1400" b="0" lang="ja-JP" altLang="en-US">
+                <a:solidFill>
+                  <a:srgbClr val="FFFFFF"/>
+                </a:solidFill>
+                <a:latin typeface="游ゴシック"/>
+                <a:ea typeface="游ゴシック"/>
+                <a:cs typeface="游ゴシック"/>
+              </a:rPr>
+              <a:t>STEP 6　ふりかえる</a:t>
+            </a:r>
+          </a:p>
+        </p:txBody>
+      </p:sp>
+      <p:sp>
+        <p:nvSpPr>
+          <p:cNvPr id="13" name="Rounded Rectangle 12"/>
+          <p:cNvSpPr/>
+          <p:nvPr/>
+        </p:nvSpPr>
+        <p:spPr>
+          <a:xfrm>
+            <a:off x="685800" y="5150000"/>
+            <a:ext cx="8200000" cy="720000"/>
+          </a:xfrm>
+          <a:prstGeom prst="roundRect">
+            <a:avLst>
+              <a:gd name="adj" fmla="val 8000"/>
+            </a:avLst>
+          </a:prstGeom>
+          <a:solidFill>
+            <a:srgbClr val="2A4A7F"/>
+          </a:solidFill>
+          <a:ln w="9525">
+            <a:solidFill>
+              <a:srgbClr val="7FB0FF"/>
+            </a:solidFill>
+          </a:ln>
+          <a:effectLst/>
+        </p:spPr>
+        <p:style>
+          <a:lnRef idx="1">
+            <a:schemeClr val="accent1"/>
+          </a:lnRef>
+          <a:fillRef idx="3">
+            <a:schemeClr val="accent1"/>
+          </a:fillRef>
+          <a:effectRef idx="2">
+            <a:schemeClr val="accent1"/>
+          </a:effectRef>
+          <a:fontRef idx="minor">
+            <a:schemeClr val="lt1"/>
+          </a:fontRef>
+        </p:style>
+        <p:txBody>
+          <a:bodyPr rtlCol="0" anchor="ctr" wrap="square"/>
+          <a:lstStyle/>
+          <a:p>
+            <a:pPr algn="l"/>
+            <a:r>
+              <a:rPr sz="1300" b="1" lang="ja-JP" altLang="en-US">
+                <a:solidFill>
+                  <a:srgbClr val="7FB0FF"/>
+                </a:solidFill>
+                <a:latin typeface="游ゴシック"/>
+                <a:ea typeface="游ゴシック"/>
+                <a:cs typeface="游ゴシック"/>
+              </a:rPr>
+              <a:t>ゴール　</a:t>
+            </a:r>
+            <a:r>
+              <a:rPr sz="1300" b="0" lang="ja-JP" altLang="en-US">
+                <a:solidFill>
+                  <a:srgbClr val="FFFFFF"/>
+                </a:solidFill>
+                <a:latin typeface="游ゴシック"/>
+                <a:ea typeface="游ゴシック"/>
+                <a:cs typeface="游ゴシック"/>
+              </a:rPr>
+              <a:t>このパートをくり返すことで、計画が実績に合わせて調整されていきます。</a:t>
+            </a:r>
+          </a:p>
+        </p:txBody>
+      </p:sp>
+      <p:sp>
+        <p:nvSpPr>
+          <p:cNvPr id="14" name="TextBox 13"/>
+          <p:cNvSpPr txBox="1"/>
+          <p:nvPr/>
+        </p:nvSpPr>
+        <p:spPr>
+          <a:xfrm>
+            <a:off x="685800" y="6280000"/>
+            <a:ext cx="5000000" cy="260000"/>
+          </a:xfrm>
+          <a:prstGeom prst="rect">
+            <a:avLst/>
+          </a:prstGeom>
+          <a:noFill/>
+        </p:spPr>
+        <p:txBody>
+          <a:bodyPr wrap="square" lIns="0" rIns="0" tIns="0" bIns="0">
+            <a:spAutoFit/>
+          </a:bodyPr>
+          <a:lstStyle/>
+          <a:p>
+            <a:pPr algn="l">
+              <a:lnSpc>
+                <a:spcPct val="130000"/>
+              </a:lnSpc>
+              <a:spcBef>
+                <a:spcPts val="0"/>
+              </a:spcBef>
+              <a:spcAft>
+                <a:spcPts val="0"/>
+              </a:spcAft>
+            </a:pPr>
+            <a:r>
+              <a:rPr sz="900" b="0" lang="ja-JP" altLang="en-US">
+                <a:solidFill>
+                  <a:srgbClr val="9CB3D9"/>
+                </a:solidFill>
+                <a:latin typeface="游ゴシック"/>
+                <a:ea typeface="游ゴシック"/>
+                <a:cs typeface="游ゴシック"/>
+              </a:rPr>
+              <a:t>ミチナリ ユーザ手順書</a:t>
+            </a:r>
+          </a:p>
+        </p:txBody>
+      </p:sp>
+      <p:sp>
+        <p:nvSpPr>
+          <p:cNvPr id="15" name="TextBox 14"/>
+          <p:cNvSpPr txBox="1"/>
+          <p:nvPr/>
+        </p:nvSpPr>
+        <p:spPr>
+          <a:xfrm>
+            <a:off x="9506200" y="6280000"/>
+            <a:ext cx="2000000" cy="260000"/>
+          </a:xfrm>
+          <a:prstGeom prst="rect">
+            <a:avLst/>
+          </a:prstGeom>
+          <a:noFill/>
+        </p:spPr>
+        <p:txBody>
+          <a:bodyPr wrap="square" lIns="0" rIns="0" tIns="0" bIns="0">
+            <a:spAutoFit/>
+          </a:bodyPr>
+          <a:lstStyle/>
+          <a:p>
+            <a:pPr algn="r">
+              <a:lnSpc>
+                <a:spcPct val="130000"/>
+              </a:lnSpc>
+              <a:spcBef>
+                <a:spcPts val="0"/>
+              </a:spcBef>
+              <a:spcAft>
+                <a:spcPts val="0"/>
+              </a:spcAft>
+            </a:pPr>
+            <a:r>
+              <a:rPr sz="900" b="0" lang="ja-JP" altLang="en-US">
+                <a:solidFill>
+                  <a:srgbClr val="9CB3D9"/>
+                </a:solidFill>
+                <a:latin typeface="游ゴシック"/>
+                <a:ea typeface="游ゴシック"/>
+                <a:cs typeface="游ゴシック"/>
+              </a:rPr>
+              <a:t>15 / 27</a:t>
+            </a:r>
+          </a:p>
+        </p:txBody>
+      </p:sp>
+    </p:spTree>
+  </p:cSld>
+  <p:clrMapOvr>
+    <a:masterClrMapping/>
+  </p:clrMapOvr>
+</p:sld>
+</file>
+
+<file path=ppt/slides/slide27.xml><?xml version="1.0" encoding="utf-8"?>
+<p:sld xmlns:a="http://schemas.openxmlformats.org/drawingml/2006/main" xmlns:p="http://schemas.openxmlformats.org/presentationml/2006/main" xmlns:r="http://schemas.openxmlformats.org/officeDocument/2006/relationships">
+  <p:cSld>
+    <p:spTree>
+      <p:nvGrpSpPr>
+        <p:cNvPr id="1" name=""/>
+        <p:cNvGrpSpPr/>
+        <p:nvPr/>
+      </p:nvGrpSpPr>
+      <p:grpSpPr/>
+      <p:sp>
+        <p:nvSpPr>
+          <p:cNvPr id="2" name="Rectangle 1"/>
+          <p:cNvSpPr/>
+          <p:nvPr/>
+        </p:nvSpPr>
+        <p:spPr>
+          <a:xfrm>
+            <a:off x="0" y="0"/>
+            <a:ext cx="12192000" cy="6858000"/>
+          </a:xfrm>
+          <a:prstGeom prst="rect">
+            <a:avLst/>
+          </a:prstGeom>
+          <a:solidFill>
+            <a:srgbClr val="1F3864"/>
+          </a:solidFill>
+          <a:ln>
+            <a:noFill/>
+          </a:ln>
+          <a:effectLst/>
+        </p:spPr>
+        <p:style>
+          <a:lnRef idx="1">
+            <a:schemeClr val="accent1"/>
+          </a:lnRef>
+          <a:fillRef idx="3">
+            <a:schemeClr val="accent1"/>
+          </a:fillRef>
+          <a:effectRef idx="2">
+            <a:schemeClr val="accent1"/>
+          </a:effectRef>
+          <a:fontRef idx="minor">
+            <a:schemeClr val="lt1"/>
+          </a:fontRef>
+        </p:style>
+        <p:txBody>
+          <a:bodyPr rtlCol="0" anchor="ctr"/>
+          <a:lstStyle/>
+          <a:p>
+            <a:pPr algn="ctr"/>
+          </a:p>
+        </p:txBody>
+      </p:sp>
+      <p:sp>
+        <p:nvSpPr>
+          <p:cNvPr id="3" name="Rounded Rectangle 2"/>
+          <p:cNvSpPr/>
+          <p:nvPr/>
+        </p:nvSpPr>
+        <p:spPr>
+          <a:xfrm>
+            <a:off x="5726200" y="1400000"/>
+            <a:ext cx="1400000" cy="380000"/>
+          </a:xfrm>
+          <a:prstGeom prst="roundRect">
+            <a:avLst>
+              <a:gd name="adj" fmla="val 40000"/>
+            </a:avLst>
+          </a:prstGeom>
+          <a:solidFill>
+            <a:srgbClr val="2A4A7F"/>
+          </a:solidFill>
+          <a:ln>
+            <a:noFill/>
+          </a:ln>
+          <a:effectLst/>
+        </p:spPr>
+        <p:style>
+          <a:lnRef idx="1">
+            <a:schemeClr val="accent1"/>
+          </a:lnRef>
+          <a:fillRef idx="3">
+            <a:schemeClr val="accent1"/>
+          </a:fillRef>
+          <a:effectRef idx="2">
+            <a:schemeClr val="accent1"/>
+          </a:effectRef>
+          <a:fontRef idx="minor">
+            <a:schemeClr val="lt1"/>
+          </a:fontRef>
+        </p:style>
+        <p:txBody>
+          <a:bodyPr rtlCol="0" anchor="ctr" wrap="none" lIns="0" rIns="0"/>
+          <a:lstStyle/>
+          <a:p>
+            <a:pPr algn="ctr"/>
+            <a:r>
+              <a:rPr sz="1000" b="0" lang="ja-JP" altLang="en-US">
+                <a:solidFill>
+                  <a:srgbClr val="9CB3D9"/>
+                </a:solidFill>
+                <a:latin typeface="游ゴシック"/>
+                <a:ea typeface="游ゴシック"/>
+                <a:cs typeface="游ゴシック"/>
+              </a:rPr>
+              <a:t>1 セットアップ</a:t>
+            </a:r>
+          </a:p>
+        </p:txBody>
+      </p:sp>
+      <p:sp>
+        <p:nvSpPr>
+          <p:cNvPr id="4" name="Rounded Rectangle 3"/>
+          <p:cNvSpPr/>
+          <p:nvPr/>
+        </p:nvSpPr>
+        <p:spPr>
+          <a:xfrm>
+            <a:off x="7186200" y="1400000"/>
+            <a:ext cx="1400000" cy="380000"/>
+          </a:xfrm>
+          <a:prstGeom prst="roundRect">
+            <a:avLst>
+              <a:gd name="adj" fmla="val 40000"/>
+            </a:avLst>
+          </a:prstGeom>
+          <a:solidFill>
+            <a:srgbClr val="2A4A7F"/>
+          </a:solidFill>
+          <a:ln>
+            <a:noFill/>
+          </a:ln>
+          <a:effectLst/>
+        </p:spPr>
+        <p:style>
+          <a:lnRef idx="1">
+            <a:schemeClr val="accent1"/>
+          </a:lnRef>
+          <a:fillRef idx="3">
+            <a:schemeClr val="accent1"/>
+          </a:fillRef>
+          <a:effectRef idx="2">
+            <a:schemeClr val="accent1"/>
+          </a:effectRef>
+          <a:fontRef idx="minor">
+            <a:schemeClr val="lt1"/>
+          </a:fontRef>
+        </p:style>
+        <p:txBody>
+          <a:bodyPr rtlCol="0" anchor="ctr" wrap="none" lIns="0" rIns="0"/>
+          <a:lstStyle/>
+          <a:p>
+            <a:pPr algn="ctr"/>
+            <a:r>
+              <a:rPr sz="1000" b="0" lang="ja-JP" altLang="en-US">
+                <a:solidFill>
+                  <a:srgbClr val="9CB3D9"/>
+                </a:solidFill>
+                <a:latin typeface="游ゴシック"/>
+                <a:ea typeface="游ゴシック"/>
+                <a:cs typeface="游ゴシック"/>
+              </a:rPr>
+              <a:t>2 目標をつくる</a:t>
+            </a:r>
+          </a:p>
+        </p:txBody>
+      </p:sp>
+      <p:sp>
+        <p:nvSpPr>
+          <p:cNvPr id="5" name="Rounded Rectangle 4"/>
+          <p:cNvSpPr/>
+          <p:nvPr/>
+        </p:nvSpPr>
+        <p:spPr>
+          <a:xfrm>
+            <a:off x="8646200" y="1400000"/>
+            <a:ext cx="1400000" cy="380000"/>
+          </a:xfrm>
+          <a:prstGeom prst="roundRect">
+            <a:avLst>
+              <a:gd name="adj" fmla="val 40000"/>
+            </a:avLst>
+          </a:prstGeom>
+          <a:solidFill>
+            <a:srgbClr val="2A4A7F"/>
+          </a:solidFill>
+          <a:ln>
+            <a:noFill/>
+          </a:ln>
+          <a:effectLst/>
+        </p:spPr>
+        <p:style>
+          <a:lnRef idx="1">
+            <a:schemeClr val="accent1"/>
+          </a:lnRef>
+          <a:fillRef idx="3">
+            <a:schemeClr val="accent1"/>
+          </a:fillRef>
+          <a:effectRef idx="2">
+            <a:schemeClr val="accent1"/>
+          </a:effectRef>
+          <a:fontRef idx="minor">
+            <a:schemeClr val="lt1"/>
+          </a:fontRef>
+        </p:style>
+        <p:txBody>
+          <a:bodyPr rtlCol="0" anchor="ctr" wrap="none" lIns="0" rIns="0"/>
+          <a:lstStyle/>
+          <a:p>
+            <a:pPr algn="ctr"/>
+            <a:r>
+              <a:rPr sz="1000" b="0" lang="ja-JP" altLang="en-US">
+                <a:solidFill>
+                  <a:srgbClr val="9CB3D9"/>
+                </a:solidFill>
+                <a:latin typeface="游ゴシック"/>
+                <a:ea typeface="游ゴシック"/>
+                <a:cs typeface="游ゴシック"/>
+              </a:rPr>
+              <a:t>3 毎日つかう</a:t>
+            </a:r>
+          </a:p>
+        </p:txBody>
+      </p:sp>
+      <p:sp>
+        <p:nvSpPr>
+          <p:cNvPr id="6" name="Rounded Rectangle 5"/>
+          <p:cNvSpPr/>
+          <p:nvPr/>
+        </p:nvSpPr>
+        <p:spPr>
+          <a:xfrm>
+            <a:off x="10106200" y="1400000"/>
+            <a:ext cx="1400000" cy="380000"/>
+          </a:xfrm>
+          <a:prstGeom prst="roundRect">
+            <a:avLst>
+              <a:gd name="adj" fmla="val 40000"/>
+            </a:avLst>
+          </a:prstGeom>
+          <a:solidFill>
+            <a:srgbClr val="7FB0FF"/>
+          </a:solidFill>
+          <a:ln>
+            <a:noFill/>
+          </a:ln>
+          <a:effectLst/>
+        </p:spPr>
+        <p:style>
+          <a:lnRef idx="1">
+            <a:schemeClr val="accent1"/>
+          </a:lnRef>
+          <a:fillRef idx="3">
+            <a:schemeClr val="accent1"/>
+          </a:fillRef>
+          <a:effectRef idx="2">
+            <a:schemeClr val="accent1"/>
+          </a:effectRef>
+          <a:fontRef idx="minor">
+            <a:schemeClr val="lt1"/>
+          </a:fontRef>
+        </p:style>
+        <p:txBody>
+          <a:bodyPr rtlCol="0" anchor="ctr" wrap="none" lIns="0" rIns="0"/>
+          <a:lstStyle/>
+          <a:p>
+            <a:pPr algn="ctr"/>
+            <a:r>
+              <a:rPr sz="1000" b="1" lang="ja-JP" altLang="en-US">
+                <a:solidFill>
+                  <a:srgbClr val="1F3864"/>
+                </a:solidFill>
+                <a:latin typeface="游ゴシック"/>
+                <a:ea typeface="游ゴシック"/>
+                <a:cs typeface="游ゴシック"/>
+              </a:rPr>
+              <a:t>4 整理する</a:t>
+            </a:r>
+          </a:p>
+        </p:txBody>
+      </p:sp>
+      <p:sp>
+        <p:nvSpPr>
+          <p:cNvPr id="7" name="TextBox 6"/>
+          <p:cNvSpPr txBox="1"/>
+          <p:nvPr/>
+        </p:nvSpPr>
+        <p:spPr>
+          <a:xfrm>
+            <a:off x="685800" y="1400000"/>
+            <a:ext cx="4000000" cy="380000"/>
+          </a:xfrm>
+          <a:prstGeom prst="rect">
+            <a:avLst/>
+          </a:prstGeom>
+          <a:noFill/>
+        </p:spPr>
+        <p:txBody>
+          <a:bodyPr wrap="square" lIns="0" rIns="0" tIns="0" bIns="0">
+            <a:spAutoFit/>
+          </a:bodyPr>
+          <a:lstStyle/>
+          <a:p>
+            <a:pPr algn="l">
+              <a:lnSpc>
+                <a:spcPct val="130000"/>
+              </a:lnSpc>
+              <a:spcBef>
+                <a:spcPts val="0"/>
+              </a:spcBef>
+              <a:spcAft>
+                <a:spcPts val="0"/>
+              </a:spcAft>
+            </a:pPr>
+            <a:r>
+              <a:rPr sz="1400" b="1" lang="ja-JP" altLang="en-US">
+                <a:solidFill>
+                  <a:srgbClr val="7FB0FF"/>
+                </a:solidFill>
+                <a:latin typeface="游ゴシック"/>
+                <a:ea typeface="游ゴシック"/>
+                <a:cs typeface="游ゴシック"/>
+              </a:rPr>
+              <a:t>PART 4</a:t>
+            </a:r>
+          </a:p>
+        </p:txBody>
+      </p:sp>
+      <p:sp>
+        <p:nvSpPr>
+          <p:cNvPr id="8" name="TextBox 7"/>
+          <p:cNvSpPr txBox="1"/>
+          <p:nvPr/>
+        </p:nvSpPr>
+        <p:spPr>
+          <a:xfrm>
+            <a:off x="685800" y="1880000"/>
+            <a:ext cx="9000000" cy="900000"/>
+          </a:xfrm>
+          <a:prstGeom prst="rect">
+            <a:avLst/>
+          </a:prstGeom>
+          <a:noFill/>
+        </p:spPr>
+        <p:txBody>
+          <a:bodyPr wrap="square" lIns="0" rIns="0" tIns="0" bIns="0">
+            <a:spAutoFit/>
+          </a:bodyPr>
+          <a:lstStyle/>
+          <a:p>
+            <a:pPr algn="l">
+              <a:lnSpc>
+                <a:spcPct val="130000"/>
+              </a:lnSpc>
+              <a:spcBef>
+                <a:spcPts val="0"/>
+              </a:spcBef>
+              <a:spcAft>
+                <a:spcPts val="0"/>
+              </a:spcAft>
+            </a:pPr>
+            <a:r>
+              <a:rPr sz="3600" b="1" lang="ja-JP" altLang="en-US">
+                <a:solidFill>
+                  <a:srgbClr val="FFFFFF"/>
+                </a:solidFill>
+                <a:latin typeface="游ゴシック"/>
+                <a:ea typeface="游ゴシック"/>
+                <a:cs typeface="游ゴシック"/>
+              </a:rPr>
+              <a:t>目標を整理する</a:t>
+            </a:r>
+          </a:p>
+        </p:txBody>
+      </p:sp>
+      <p:sp>
+        <p:nvSpPr>
+          <p:cNvPr id="9" name="Rectangle 8"/>
+          <p:cNvSpPr/>
+          <p:nvPr/>
+        </p:nvSpPr>
+        <p:spPr>
+          <a:xfrm>
+            <a:off x="685800" y="2960000"/>
+            <a:ext cx="1400000" cy="45720"/>
+          </a:xfrm>
+          <a:prstGeom prst="rect">
+            <a:avLst/>
+          </a:prstGeom>
+          <a:solidFill>
+            <a:srgbClr val="7FB0FF"/>
+          </a:solidFill>
+          <a:ln>
+            <a:noFill/>
+          </a:ln>
+          <a:effectLst/>
+        </p:spPr>
+        <p:style>
+          <a:lnRef idx="1">
+            <a:schemeClr val="accent1"/>
+          </a:lnRef>
+          <a:fillRef idx="3">
+            <a:schemeClr val="accent1"/>
+          </a:fillRef>
+          <a:effectRef idx="2">
+            <a:schemeClr val="accent1"/>
+          </a:effectRef>
+          <a:fontRef idx="minor">
+            <a:schemeClr val="lt1"/>
+          </a:fontRef>
+        </p:style>
+        <p:txBody>
+          <a:bodyPr rtlCol="0" anchor="ctr"/>
+          <a:lstStyle/>
+          <a:p>
+            <a:pPr algn="ctr"/>
+          </a:p>
+        </p:txBody>
+      </p:sp>
+      <p:sp>
+        <p:nvSpPr>
+          <p:cNvPr id="10" name="TextBox 9"/>
+          <p:cNvSpPr txBox="1"/>
+          <p:nvPr/>
+        </p:nvSpPr>
+        <p:spPr>
+          <a:xfrm>
+            <a:off x="685800" y="3200000"/>
+            <a:ext cx="9000000" cy="420000"/>
+          </a:xfrm>
+          <a:prstGeom prst="rect">
+            <a:avLst/>
+          </a:prstGeom>
+          <a:noFill/>
+        </p:spPr>
+        <p:txBody>
+          <a:bodyPr wrap="square" lIns="0" rIns="0" tIns="0" bIns="0">
+            <a:spAutoFit/>
+          </a:bodyPr>
+          <a:lstStyle/>
+          <a:p>
+            <a:pPr algn="l">
+              <a:lnSpc>
+                <a:spcPct val="130000"/>
+              </a:lnSpc>
+              <a:spcBef>
+                <a:spcPts val="0"/>
+              </a:spcBef>
+              <a:spcAft>
+                <a:spcPts val="0"/>
+              </a:spcAft>
+            </a:pPr>
+            <a:r>
+              <a:rPr sz="1600" b="0" lang="ja-JP" altLang="en-US">
+                <a:solidFill>
+                  <a:srgbClr val="D8DDE5"/>
+                </a:solidFill>
+                <a:latin typeface="游ゴシック"/>
+                <a:ea typeface="游ゴシック"/>
+                <a:cs typeface="游ゴシック"/>
+              </a:rPr>
+              <a:t>終わった目標をアーカイブ・削除して、一覧を整えます。</a:t>
+            </a:r>
+          </a:p>
+        </p:txBody>
+      </p:sp>
+      <p:sp>
+        <p:nvSpPr>
+          <p:cNvPr id="11" name="TextBox 10"/>
+          <p:cNvSpPr txBox="1"/>
+          <p:nvPr/>
+        </p:nvSpPr>
+        <p:spPr>
+          <a:xfrm>
+            <a:off x="685800" y="3800000"/>
+            <a:ext cx="9000000" cy="300000"/>
+          </a:xfrm>
+          <a:prstGeom prst="rect">
+            <a:avLst/>
+          </a:prstGeom>
+          <a:noFill/>
+        </p:spPr>
+        <p:txBody>
+          <a:bodyPr wrap="square" lIns="0" rIns="0" tIns="0" bIns="0">
+            <a:spAutoFit/>
+          </a:bodyPr>
+          <a:lstStyle/>
+          <a:p>
+            <a:pPr algn="l">
+              <a:lnSpc>
+                <a:spcPct val="130000"/>
+              </a:lnSpc>
+              <a:spcBef>
+                <a:spcPts val="0"/>
+              </a:spcBef>
+              <a:spcAft>
+                <a:spcPts val="0"/>
+              </a:spcAft>
+            </a:pPr>
+            <a:r>
+              <a:rPr sz="1100" b="1" lang="ja-JP" altLang="en-US">
+                <a:solidFill>
+                  <a:srgbClr val="9CB3D9"/>
+                </a:solidFill>
+                <a:latin typeface="游ゴシック"/>
+                <a:ea typeface="游ゴシック"/>
+                <a:cs typeface="游ゴシック"/>
+              </a:rPr>
+              <a:t>このパートに含まれる手順</a:t>
+            </a:r>
+          </a:p>
+        </p:txBody>
+      </p:sp>
+      <p:sp>
+        <p:nvSpPr>
+          <p:cNvPr id="12" name="TextBox 11"/>
+          <p:cNvSpPr txBox="1"/>
+          <p:nvPr/>
+        </p:nvSpPr>
+        <p:spPr>
+          <a:xfrm>
+            <a:off x="685800" y="4160000"/>
+            <a:ext cx="9000000" cy="800000"/>
+          </a:xfrm>
+          <a:prstGeom prst="rect">
+            <a:avLst/>
+          </a:prstGeom>
+          <a:noFill/>
+        </p:spPr>
+        <p:txBody>
+          <a:bodyPr wrap="square" lIns="0" rIns="0" tIns="0" bIns="0">
+            <a:spAutoFit/>
+          </a:bodyPr>
+          <a:lstStyle/>
+          <a:p>
+            <a:pPr algn="l">
+              <a:lnSpc>
+                <a:spcPct val="130000"/>
+              </a:lnSpc>
+              <a:spcBef>
+                <a:spcPts val="0"/>
+              </a:spcBef>
+              <a:spcAft>
+                <a:spcPts val="600"/>
+              </a:spcAft>
+            </a:pPr>
+            <a:r>
+              <a:rPr sz="1400" b="0" lang="ja-JP" altLang="en-US">
+                <a:solidFill>
+                  <a:srgbClr val="FFFFFF"/>
+                </a:solidFill>
+                <a:latin typeface="游ゴシック"/>
+                <a:ea typeface="游ゴシック"/>
+                <a:cs typeface="游ゴシック"/>
+              </a:rPr>
+              <a:t>STEP 7　目標を整理する</a:t>
+            </a:r>
+          </a:p>
+        </p:txBody>
+      </p:sp>
+      <p:sp>
+        <p:nvSpPr>
+          <p:cNvPr id="13" name="Rounded Rectangle 12"/>
+          <p:cNvSpPr/>
+          <p:nvPr/>
+        </p:nvSpPr>
+        <p:spPr>
+          <a:xfrm>
+            <a:off x="685800" y="5150000"/>
+            <a:ext cx="8200000" cy="720000"/>
+          </a:xfrm>
+          <a:prstGeom prst="roundRect">
+            <a:avLst>
+              <a:gd name="adj" fmla="val 8000"/>
+            </a:avLst>
+          </a:prstGeom>
+          <a:solidFill>
+            <a:srgbClr val="2A4A7F"/>
+          </a:solidFill>
+          <a:ln w="9525">
+            <a:solidFill>
+              <a:srgbClr val="7FB0FF"/>
+            </a:solidFill>
+          </a:ln>
+          <a:effectLst/>
+        </p:spPr>
+        <p:style>
+          <a:lnRef idx="1">
+            <a:schemeClr val="accent1"/>
+          </a:lnRef>
+          <a:fillRef idx="3">
+            <a:schemeClr val="accent1"/>
+          </a:fillRef>
+          <a:effectRef idx="2">
+            <a:schemeClr val="accent1"/>
+          </a:effectRef>
+          <a:fontRef idx="minor">
+            <a:schemeClr val="lt1"/>
+          </a:fontRef>
+        </p:style>
+        <p:txBody>
+          <a:bodyPr rtlCol="0" anchor="ctr" wrap="square"/>
+          <a:lstStyle/>
+          <a:p>
+            <a:pPr algn="l"/>
+            <a:r>
+              <a:rPr sz="1300" b="1" lang="ja-JP" altLang="en-US">
+                <a:solidFill>
+                  <a:srgbClr val="7FB0FF"/>
+                </a:solidFill>
+                <a:latin typeface="游ゴシック"/>
+                <a:ea typeface="游ゴシック"/>
+                <a:cs typeface="游ゴシック"/>
+              </a:rPr>
+              <a:t>ゴール　</a:t>
+            </a:r>
+            <a:r>
+              <a:rPr sz="1300" b="0" lang="ja-JP" altLang="en-US">
+                <a:solidFill>
+                  <a:srgbClr val="FFFFFF"/>
+                </a:solidFill>
+                <a:latin typeface="游ゴシック"/>
+                <a:ea typeface="游ゴシック"/>
+                <a:cs typeface="游ゴシック"/>
+              </a:rPr>
+              <a:t>このパートが終わると、目標一覧が進行中のものだけになります。</a:t>
+            </a:r>
+          </a:p>
+        </p:txBody>
+      </p:sp>
+      <p:sp>
+        <p:nvSpPr>
+          <p:cNvPr id="14" name="TextBox 13"/>
+          <p:cNvSpPr txBox="1"/>
+          <p:nvPr/>
+        </p:nvSpPr>
+        <p:spPr>
+          <a:xfrm>
+            <a:off x="685800" y="6280000"/>
+            <a:ext cx="5000000" cy="260000"/>
+          </a:xfrm>
+          <a:prstGeom prst="rect">
+            <a:avLst/>
+          </a:prstGeom>
+          <a:noFill/>
+        </p:spPr>
+        <p:txBody>
+          <a:bodyPr wrap="square" lIns="0" rIns="0" tIns="0" bIns="0">
+            <a:spAutoFit/>
+          </a:bodyPr>
+          <a:lstStyle/>
+          <a:p>
+            <a:pPr algn="l">
+              <a:lnSpc>
+                <a:spcPct val="130000"/>
+              </a:lnSpc>
+              <a:spcBef>
+                <a:spcPts val="0"/>
+              </a:spcBef>
+              <a:spcAft>
+                <a:spcPts val="0"/>
+              </a:spcAft>
+            </a:pPr>
+            <a:r>
+              <a:rPr sz="900" b="0" lang="ja-JP" altLang="en-US">
+                <a:solidFill>
+                  <a:srgbClr val="9CB3D9"/>
+                </a:solidFill>
+                <a:latin typeface="游ゴシック"/>
+                <a:ea typeface="游ゴシック"/>
+                <a:cs typeface="游ゴシック"/>
+              </a:rPr>
+              <a:t>ミチナリ ユーザ手順書</a:t>
+            </a:r>
+          </a:p>
+        </p:txBody>
+      </p:sp>
+      <p:sp>
+        <p:nvSpPr>
+          <p:cNvPr id="15" name="TextBox 14"/>
+          <p:cNvSpPr txBox="1"/>
+          <p:nvPr/>
+        </p:nvSpPr>
+        <p:spPr>
+          <a:xfrm>
+            <a:off x="9506200" y="6280000"/>
+            <a:ext cx="2000000" cy="260000"/>
+          </a:xfrm>
+          <a:prstGeom prst="rect">
+            <a:avLst/>
+          </a:prstGeom>
+          <a:noFill/>
+        </p:spPr>
+        <p:txBody>
+          <a:bodyPr wrap="square" lIns="0" rIns="0" tIns="0" bIns="0">
+            <a:spAutoFit/>
+          </a:bodyPr>
+          <a:lstStyle/>
+          <a:p>
+            <a:pPr algn="r">
+              <a:lnSpc>
+                <a:spcPct val="130000"/>
+              </a:lnSpc>
+              <a:spcBef>
+                <a:spcPts val="0"/>
+              </a:spcBef>
+              <a:spcAft>
+                <a:spcPts val="0"/>
+              </a:spcAft>
+            </a:pPr>
+            <a:r>
+              <a:rPr sz="900" b="0" lang="ja-JP" altLang="en-US">
+                <a:solidFill>
+                  <a:srgbClr val="9CB3D9"/>
+                </a:solidFill>
+                <a:latin typeface="游ゴシック"/>
+                <a:ea typeface="游ゴシック"/>
+                <a:cs typeface="游ゴシック"/>
+              </a:rPr>
+              <a:t>26 / 27</a:t>
             </a:r>
           </a:p>
         </p:txBody>
@@ -11005,7 +14064,7 @@
                 <a:latin typeface="游ゴシック"/>
                 <a:ea typeface="游ゴシック"/>
               </a:rPr>
-              <a:t>3 / 23</a:t>
+              <a:t>4 / 27</a:t>
             </a:r>
           </a:p>
         </p:txBody>
@@ -11481,7 +14540,7 @@
                 <a:latin typeface="游ゴシック"/>
                 <a:ea typeface="游ゴシック"/>
               </a:rPr>
-              <a:t>4 / 23</a:t>
+              <a:t>5 / 27</a:t>
             </a:r>
           </a:p>
         </p:txBody>
@@ -11722,7 +14781,99 @@
                 <a:latin typeface="游ゴシック"/>
                 <a:ea typeface="游ゴシック"/>
               </a:rPr>
-              <a:t>② 「接続先URL（テナントホスト）」を xxx.newton-x.net の形式で入力します。</a:t>
+              <a:t>② 「接続先URL（テナントホスト）」を、ご所属に応じて次のとおり入力します。</a:t>
+            </a:r>
+          </a:p>
+          <a:p>
+            <a:pPr algn="l" eaLnBrk="1" latinLnBrk="0" hangingPunct="1">
+              <a:lnSpc>
+                <a:spcPct val="125000"/>
+              </a:lnSpc>
+              <a:spcBef>
+                <a:spcPts val="0"/>
+              </a:spcBef>
+              <a:spcAft>
+                <a:spcPts val="200"/>
+              </a:spcAft>
+            </a:pPr>
+            <a:r>
+              <a:rPr lang="ja-JP" altLang="en-US" sz="1100" b="0">
+                <a:solidFill>
+                  <a:srgbClr val="333333"/>
+                </a:solidFill>
+                <a:latin typeface="游ゴシック"/>
+                <a:ea typeface="游ゴシック"/>
+              </a:rPr>
+              <a:t>・セラク内勤者：seraku.newton-x.net</a:t>
+            </a:r>
+          </a:p>
+          <a:p>
+            <a:pPr algn="l" eaLnBrk="1" latinLnBrk="0" hangingPunct="1">
+              <a:lnSpc>
+                <a:spcPct val="125000"/>
+              </a:lnSpc>
+              <a:spcBef>
+                <a:spcPts val="0"/>
+              </a:spcBef>
+              <a:spcAft>
+                <a:spcPts val="200"/>
+              </a:spcAft>
+            </a:pPr>
+            <a:r>
+              <a:rPr lang="ja-JP" altLang="en-US" sz="1100" b="0">
+                <a:solidFill>
+                  <a:srgbClr val="333333"/>
+                </a:solidFill>
+                <a:latin typeface="游ゴシック"/>
+                <a:ea typeface="游ゴシック"/>
+              </a:rPr>
+              <a:t>・セラク常駐者：seraku-ex.newton-x.net</a:t>
+            </a:r>
+          </a:p>
+          <a:p>
+            <a:pPr algn="l" eaLnBrk="1" latinLnBrk="0" hangingPunct="1">
+              <a:lnSpc>
+                <a:spcPct val="125000"/>
+              </a:lnSpc>
+              <a:spcBef>
+                <a:spcPts val="0"/>
+              </a:spcBef>
+              <a:spcAft>
+                <a:spcPts val="200"/>
+              </a:spcAft>
+            </a:pPr>
+            <a:r>
+              <a:rPr lang="ja-JP" altLang="en-US" sz="1100" b="0">
+                <a:solidFill>
+                  <a:srgbClr val="333333"/>
+                </a:solidFill>
+                <a:latin typeface="游ゴシック"/>
+                <a:ea typeface="游ゴシック"/>
+              </a:rPr>
+              <a:t>・セラクビジネスソリューションズ：bs-seraku.newton-x.net</a:t>
+            </a:r>
+          </a:p>
+          <a:p>
+            <a:pPr algn="l" eaLnBrk="1" latinLnBrk="0" hangingPunct="1">
+              <a:lnSpc>
+                <a:spcPct val="125000"/>
+              </a:lnSpc>
+              <a:spcBef>
+                <a:spcPts val="0"/>
+              </a:spcBef>
+              <a:spcAft>
+                <a:spcPts val="200"/>
+              </a:spcAft>
+            </a:pPr>
+            <a:r>
+              <a:rPr lang="ja-JP" altLang="en-US" sz="1100" b="0">
+                <a:solidFill>
+                  <a:srgbClr val="333333"/>
+                </a:solidFill>
+                <a:latin typeface="游ゴシック"/>
+                <a:ea typeface="游ゴシック"/>
+              </a:rPr>
+              <a:t>・AND Think：andthink.newton-x.net</a:t>
             </a:r>
           </a:p>
           <a:p>
@@ -11882,7 +15033,7 @@
                 <a:latin typeface="游ゴシック"/>
                 <a:ea typeface="游ゴシック"/>
               </a:rPr>
-              <a:t>Host はドメインまで含めた完全な形式で入力してください。形式に誤りがあると「認証済み」と表示されたままエラーになります。</a:t>
+              <a:t>一覧にない場合は、NewtonXにログインするURL https://xxx.newton-x.net の xxx 部分です。誤ると「認証済み」表示のままエラーになります。</a:t>
             </a:r>
           </a:p>
         </p:txBody>
@@ -12003,7 +15154,7 @@
                 <a:latin typeface="游ゴシック"/>
                 <a:ea typeface="游ゴシック"/>
               </a:rPr>
-              <a:t>5 / 23</a:t>
+              <a:t>6 / 27</a:t>
             </a:r>
           </a:p>
         </p:txBody>
@@ -12411,7 +15562,7 @@
                 <a:latin typeface="游ゴシック"/>
                 <a:ea typeface="游ゴシック"/>
               </a:rPr>
-              <a:t>6 / 23</a:t>
+              <a:t>8 / 27</a:t>
             </a:r>
           </a:p>
         </p:txBody>
@@ -12939,7 +16090,7 @@
                 <a:latin typeface="游ゴシック"/>
                 <a:ea typeface="游ゴシック"/>
               </a:rPr>
-              <a:t>7 / 23</a:t>
+              <a:t>9 / 27</a:t>
             </a:r>
           </a:p>
         </p:txBody>
@@ -13438,7 +16589,7 @@
                 <a:latin typeface="游ゴシック"/>
                 <a:ea typeface="游ゴシック"/>
               </a:rPr>
-              <a:t>8 / 23</a:t>
+              <a:t>10 / 27</a:t>
             </a:r>
           </a:p>
         </p:txBody>
@@ -13875,7 +17026,7 @@
                 <a:latin typeface="游ゴシック"/>
                 <a:ea typeface="游ゴシック"/>
               </a:rPr>
-              <a:t>9 / 23</a:t>
+              <a:t>11 / 27</a:t>
             </a:r>
           </a:p>
         </p:txBody>

--- a/docs/ユーザ手順書.pptx
+++ b/docs/ユーザ手順書.pptx
@@ -10,14 +10,14 @@
     <p:sldId id="279" r:id="rId4"/>
     <p:sldId id="258" r:id="rId5"/>
     <p:sldId id="259" r:id="rId6"/>
-    <p:sldId id="283" r:id="rId8"/>
-    <p:sldId id="284" r:id="rId9"/>
-    <p:sldId id="285" r:id="rId10"/>
-    <p:sldId id="286" r:id="rId11"/>
-    <p:sldId id="287" r:id="rId12"/>
-    <p:sldId id="288" r:id="rId13"/>
-    <p:sldId id="289" r:id="rId14"/>
-    <p:sldId id="260" r:id="rId7"/>
+    <p:sldId id="283" r:id="rId7"/>
+    <p:sldId id="284" r:id="rId8"/>
+    <p:sldId id="285" r:id="rId9"/>
+    <p:sldId id="286" r:id="rId10"/>
+    <p:sldId id="287" r:id="rId11"/>
+    <p:sldId id="288" r:id="rId12"/>
+    <p:sldId id="289" r:id="rId13"/>
+    <p:sldId id="260" r:id="rId14"/>
     <p:sldId id="280" r:id="rId15"/>
     <p:sldId id="261" r:id="rId16"/>
     <p:sldId id="262" r:id="rId17"/>
@@ -139,62 +139,76 @@
   </p:defaultTextStyle>
   <p:extLst>
     <p:ext uri="{521415D9-36F7-43E2-AB2F-B90AF26B5E84}">
-      <ns2:sectionLst xmlns:ns2="http://schemas.microsoft.com/office/powerpoint/2010/main">
-        <ns2:section name="表紙・全体の流れ" id="{00000001-1111-4A2B-9C3D-000000000001}">
-          <ns2:sldIdLst>
-            <ns2:sldId id="256"/>
-            <ns2:sldId id="257"/>
-          </ns2:sldIdLst>
-        </ns2:section>
-        <ns2:section name="PART 1 セットアップ" id="{00000002-1111-4A2B-9C3D-000000000002}">
-          <ns2:sldIdLst>
-            <ns2:sldId id="279"/>
-            <ns2:sldId id="258"/>
-            <ns2:sldId id="259"/>
-            <ns2:sldId id="283"/>
-            <ns2:sldId id="284"/>
-            <ns2:sldId id="285"/>
-            <ns2:sldId id="286"/>
-            <ns2:sldId id="287"/>
-            <ns2:sldId id="288"/>
-            <ns2:sldId id="289"/>
-            <ns2:sldId id="260"/>
-          </ns2:sldIdLst>
-        </ns2:section>
-        <ns2:section name="PART 2 目標をつくる" id="{00000003-1111-4A2B-9C3D-000000000003}">
-          <ns2:sldIdLst>
-            <ns2:sldId id="280"/>
-            <ns2:sldId id="261"/>
-            <ns2:sldId id="262"/>
-            <ns2:sldId id="263"/>
-            <ns2:sldId id="264"/>
-            <ns2:sldId id="265"/>
-            <ns2:sldId id="266"/>
-            <ns2:sldId id="267"/>
-          </ns2:sldIdLst>
-        </ns2:section>
-        <ns2:section name="PART 3 毎日つかう" id="{00000004-1111-4A2B-9C3D-000000000004}">
-          <ns2:sldIdLst>
-            <ns2:sldId id="281"/>
-            <ns2:sldId id="268"/>
-            <ns2:sldId id="269"/>
-            <ns2:sldId id="270"/>
-            <ns2:sldId id="271"/>
-            <ns2:sldId id="272"/>
-            <ns2:sldId id="273"/>
-            <ns2:sldId id="274"/>
-            <ns2:sldId id="275"/>
-            <ns2:sldId id="276"/>
-            <ns2:sldId id="277"/>
-          </ns2:sldIdLst>
-        </ns2:section>
-        <ns2:section name="PART 4 目標を整理する" id="{00000005-1111-4A2B-9C3D-000000000005}">
-          <ns2:sldIdLst>
-            <ns2:sldId id="282"/>
-            <ns2:sldId id="278"/>
-          </ns2:sldIdLst>
-        </ns2:section>
-      </ns2:sectionLst>
+      <p14:sectionLst xmlns:p14="http://schemas.microsoft.com/office/powerpoint/2010/main">
+        <p14:section name="表紙・全体の流れ" id="{00000001-1111-4A2B-9C3D-000000000001}">
+          <p14:sldIdLst>
+            <p14:sldId id="256"/>
+            <p14:sldId id="257"/>
+          </p14:sldIdLst>
+        </p14:section>
+        <p14:section name="PART 1 セットアップ" id="{00000002-1111-4A2B-9C3D-000000000002}">
+          <p14:sldIdLst>
+            <p14:sldId id="279"/>
+            <p14:sldId id="258"/>
+            <p14:sldId id="259"/>
+            <p14:sldId id="283"/>
+            <p14:sldId id="284"/>
+            <p14:sldId id="285"/>
+            <p14:sldId id="286"/>
+            <p14:sldId id="287"/>
+            <p14:sldId id="288"/>
+            <p14:sldId id="289"/>
+            <p14:sldId id="260"/>
+          </p14:sldIdLst>
+        </p14:section>
+        <p14:section name="PART 2 目標をつくる" id="{00000003-1111-4A2B-9C3D-000000000003}">
+          <p14:sldIdLst>
+            <p14:sldId id="280"/>
+            <p14:sldId id="261"/>
+            <p14:sldId id="262"/>
+            <p14:sldId id="263"/>
+            <p14:sldId id="264"/>
+            <p14:sldId id="265"/>
+            <p14:sldId id="266"/>
+            <p14:sldId id="267"/>
+          </p14:sldIdLst>
+        </p14:section>
+        <p14:section name="PART 3 毎日つかう" id="{00000004-1111-4A2B-9C3D-000000000004}">
+          <p14:sldIdLst>
+            <p14:sldId id="281"/>
+            <p14:sldId id="268"/>
+            <p14:sldId id="269"/>
+            <p14:sldId id="270"/>
+            <p14:sldId id="271"/>
+            <p14:sldId id="272"/>
+            <p14:sldId id="273"/>
+            <p14:sldId id="274"/>
+            <p14:sldId id="275"/>
+            <p14:sldId id="276"/>
+            <p14:sldId id="277"/>
+          </p14:sldIdLst>
+        </p14:section>
+        <p14:section name="PART 4 目標を整理する" id="{00000005-1111-4A2B-9C3D-000000000005}">
+          <p14:sldIdLst>
+            <p14:sldId id="282"/>
+            <p14:sldId id="278"/>
+          </p14:sldIdLst>
+        </p14:section>
+      </p14:sectionLst>
+    </p:ext>
+    <p:ext uri="{EFAFB233-063F-42B5-8137-9DF3F51BA10A}">
+      <p15:sldGuideLst xmlns:p15="http://schemas.microsoft.com/office/powerpoint/2012/main">
+        <p15:guide id="1" orient="horz" pos="2160">
+          <p15:clr>
+            <a:srgbClr val="A4A3A4"/>
+          </p15:clr>
+        </p15:guide>
+        <p15:guide id="2" pos="2880">
+          <p15:clr>
+            <a:srgbClr val="A4A3A4"/>
+          </p15:clr>
+        </p15:guide>
+      </p15:sldGuideLst>
     </p:ext>
   </p:extLst>
 </p:presentation>
@@ -3659,7 +3673,7 @@
                 <a:latin typeface="游ゴシック"/>
                 <a:ea typeface="游ゴシック"/>
               </a:rPr>
-              <a:t>PAT を取得する ④ 発行ダイアログを開く</a:t>
+              <a:t>PAT を取得する ⑤ トークン名を入力して発行する</a:t>
             </a:r>
           </a:p>
         </p:txBody>
@@ -3750,7 +3764,7 @@
                 <a:latin typeface="游ゴシック"/>
                 <a:ea typeface="游ゴシック"/>
               </a:rPr>
-              <a:t>① 「NewtonX ADK Token 発行」ダイアログが開きます。</a:t>
+              <a:t>① 「トークン名」に、用途がわかる名前を入力します（例：ミチナリ）。</a:t>
             </a:r>
           </a:p>
           <a:p>
@@ -3773,7 +3787,7 @@
                 <a:latin typeface="游ゴシック"/>
                 <a:ea typeface="游ゴシック"/>
               </a:rPr>
-              <a:t>② 「トークン名」が空のあいだは「発行する」を押せません。</a:t>
+              <a:t>② 「発行する」をクリックします。</a:t>
             </a:r>
           </a:p>
         </p:txBody>
@@ -3864,7 +3878,7 @@
                 <a:latin typeface="游ゴシック"/>
                 <a:ea typeface="游ゴシック"/>
               </a:rPr>
-              <a:t>トークン名は、あとから一覧で見分けるための名前です。</a:t>
+              <a:t>用途ごとに分けて発行しておくと、あとで管理しやすくなります。</a:t>
             </a:r>
           </a:p>
         </p:txBody>
@@ -3956,17 +3970,17 @@
                 <a:latin typeface="游ゴシック"/>
                 <a:ea typeface="游ゴシック"/>
               </a:rPr>
-              <a:t>9 / 34</a:t>
+              <a:t>10 / 34</a:t>
             </a:r>
           </a:p>
         </p:txBody>
       </p:sp>
       <p:pic>
         <p:nvPicPr>
-          <p:cNvPr id="9" name="図 2" descr="The image shows a user interface with a field for entering a token name, with options to cancel or proceed with the token generation.&#10;&#10;AI 生成コンテンツは誤りを含む可能性があります。">
+          <p:cNvPr id="9" name="図 2" descr="The image is a Japanese interface showing a NewX ADK Token with fields for entering the token's name (PAD), a cancel button, and a button to proceed with the token issuance.&#10;&#10;AI 生成コンテンツは誤りを含む可能性があります。">
             <a:extLst>
               <a:ext uri="{FF2B5EF4-FFF2-40B4-BE49-F238E27FC236}">
-                <a16:creationId xmlns:a16="http://schemas.microsoft.com/office/drawing/2014/main" id="{A9668B4F-A798-988A-849D-4A6882334B59}"/>
+                <a16:creationId xmlns:a16="http://schemas.microsoft.com/office/drawing/2014/main" id="{765642D4-8ED1-47DA-E41F-999DF2E03EEC}"/>
               </a:ext>
             </a:extLst>
           </p:cNvPr>
@@ -3983,8 +3997,8 @@
         </p:blipFill>
         <p:spPr>
           <a:xfrm>
-            <a:off x="5206000" y="2577371"/>
-            <a:ext cx="5600000" cy="2355257"/>
+            <a:off x="5206000" y="2588073"/>
+            <a:ext cx="5600000" cy="2333854"/>
           </a:xfrm>
           <a:prstGeom prst="rect">
             <a:avLst/>
@@ -3999,7 +4013,7 @@
     </p:spTree>
     <p:extLst>
       <p:ext uri="{BB962C8B-B14F-4D97-AF65-F5344CB8AC3E}">
-        <p14:creationId xmlns:p14="http://schemas.microsoft.com/office/powerpoint/2010/main" val="1497915547"/>
+        <p14:creationId xmlns:p14="http://schemas.microsoft.com/office/powerpoint/2010/main" val="1457868722"/>
       </p:ext>
     </p:extLst>
   </p:cSld>
@@ -4123,7 +4137,7 @@
                 <a:latin typeface="游ゴシック"/>
                 <a:ea typeface="游ゴシック"/>
               </a:rPr>
-              <a:t>PAT を取得する ⑤ トークン名を入力して発行する</a:t>
+              <a:t>PAT を取得する ⑥ トークンをコピーする</a:t>
             </a:r>
           </a:p>
         </p:txBody>
@@ -4214,7 +4228,7 @@
                 <a:latin typeface="游ゴシック"/>
                 <a:ea typeface="游ゴシック"/>
               </a:rPr>
-              <a:t>① 「トークン名」に、用途がわかる名前を入力します（例：ミチナリ）。</a:t>
+              <a:t>① 「NewtonX ADK Token が生成されました」と表示されます。</a:t>
             </a:r>
           </a:p>
           <a:p>
@@ -4237,7 +4251,53 @@
                 <a:latin typeface="游ゴシック"/>
                 <a:ea typeface="游ゴシック"/>
               </a:rPr>
-              <a:t>② 「発行する」をクリックします。</a:t>
+              <a:t>② 右側のコピーアイコンを押して、トークンをコピーします。</a:t>
+            </a:r>
+          </a:p>
+          <a:p>
+            <a:pPr algn="l" eaLnBrk="1" latinLnBrk="0" hangingPunct="1">
+              <a:lnSpc>
+                <a:spcPct val="140000"/>
+              </a:lnSpc>
+              <a:spcBef>
+                <a:spcPts val="0"/>
+              </a:spcBef>
+              <a:spcAft>
+                <a:spcPts val="900"/>
+              </a:spcAft>
+            </a:pPr>
+            <a:r>
+              <a:rPr lang="ja-JP" altLang="en-US" sz="1200" b="0">
+                <a:solidFill>
+                  <a:srgbClr val="333333"/>
+                </a:solidFill>
+                <a:latin typeface="游ゴシック"/>
+                <a:ea typeface="游ゴシック"/>
+              </a:rPr>
+              <a:t>③ 目のアイコンを押すと、文字列を表示して確認できます。</a:t>
+            </a:r>
+          </a:p>
+          <a:p>
+            <a:pPr algn="l" eaLnBrk="1" latinLnBrk="0" hangingPunct="1">
+              <a:lnSpc>
+                <a:spcPct val="140000"/>
+              </a:lnSpc>
+              <a:spcBef>
+                <a:spcPts val="0"/>
+              </a:spcBef>
+              <a:spcAft>
+                <a:spcPts val="900"/>
+              </a:spcAft>
+            </a:pPr>
+            <a:r>
+              <a:rPr lang="ja-JP" altLang="en-US" sz="1200" b="0">
+                <a:solidFill>
+                  <a:srgbClr val="333333"/>
+                </a:solidFill>
+                <a:latin typeface="游ゴシック"/>
+                <a:ea typeface="游ゴシック"/>
+              </a:rPr>
+              <a:t>④ 「閉じる」を押します。</a:t>
             </a:r>
           </a:p>
         </p:txBody>
@@ -4305,7 +4365,7 @@
                 <a:latin typeface="游ゴシック"/>
                 <a:ea typeface="游ゴシック"/>
               </a:rPr>
-              <a:t>補足</a:t>
+              <a:t>注意</a:t>
             </a:r>
           </a:p>
           <a:p>
@@ -4328,7 +4388,7 @@
                 <a:latin typeface="游ゴシック"/>
                 <a:ea typeface="游ゴシック"/>
               </a:rPr>
-              <a:t>用途ごとに分けて発行しておくと、あとで管理しやすくなります。</a:t>
+              <a:t>閉じると二度と表示されません。必ずコピーしてから閉じてください。</a:t>
             </a:r>
           </a:p>
         </p:txBody>
@@ -4420,17 +4480,17 @@
                 <a:latin typeface="游ゴシック"/>
                 <a:ea typeface="游ゴシック"/>
               </a:rPr>
-              <a:t>10 / 34</a:t>
+              <a:t>11 / 34</a:t>
             </a:r>
           </a:p>
         </p:txBody>
       </p:sp>
       <p:pic>
         <p:nvPicPr>
-          <p:cNvPr id="9" name="図 2" descr="The image is a Japanese interface showing a NewX ADK Token with fields for entering the token's name (PAD), a cancel button, and a button to proceed with the token issuance.&#10;&#10;AI 生成コンテンツは誤りを含む可能性があります。">
+          <p:cNvPr id="9" name="図 2" descr="The image shows a Japanese interface with a dialogue indicating that a NewtonX ADK Token has been generated, instructing the user to copy and securely store the token, and warning that the dialogue cannot be closed and reopened.&#10;&#10;AI 生成コンテンツは誤りを含む可能性があります。">
             <a:extLst>
               <a:ext uri="{FF2B5EF4-FFF2-40B4-BE49-F238E27FC236}">
-                <a16:creationId xmlns:a16="http://schemas.microsoft.com/office/drawing/2014/main" id="{765642D4-8ED1-47DA-E41F-999DF2E03EEC}"/>
+                <a16:creationId xmlns:a16="http://schemas.microsoft.com/office/drawing/2014/main" id="{5D4177D6-5999-D90D-40FA-4A0352509FFA}"/>
               </a:ext>
             </a:extLst>
           </p:cNvPr>
@@ -4447,8 +4507,8 @@
         </p:blipFill>
         <p:spPr>
           <a:xfrm>
-            <a:off x="5206000" y="2588073"/>
-            <a:ext cx="5600000" cy="2333854"/>
+            <a:off x="5206000" y="2513667"/>
+            <a:ext cx="5600000" cy="2482666"/>
           </a:xfrm>
           <a:prstGeom prst="rect">
             <a:avLst/>
@@ -4463,7 +4523,7 @@
     </p:spTree>
     <p:extLst>
       <p:ext uri="{BB962C8B-B14F-4D97-AF65-F5344CB8AC3E}">
-        <p14:creationId xmlns:p14="http://schemas.microsoft.com/office/powerpoint/2010/main" val="1457868722"/>
+        <p14:creationId xmlns:p14="http://schemas.microsoft.com/office/powerpoint/2010/main" val="3078026385"/>
       </p:ext>
     </p:extLst>
   </p:cSld>
@@ -4587,7 +4647,7 @@
                 <a:latin typeface="游ゴシック"/>
                 <a:ea typeface="游ゴシック"/>
               </a:rPr>
-              <a:t>PAT を取得する ⑥ トークンをコピーする</a:t>
+              <a:t>PAT を取得する ⑦ 発行結果を確認する</a:t>
             </a:r>
           </a:p>
         </p:txBody>
@@ -4678,7 +4738,7 @@
                 <a:latin typeface="游ゴシック"/>
                 <a:ea typeface="游ゴシック"/>
               </a:rPr>
-              <a:t>① 「NewtonX ADK Token が生成されました」と表示されます。</a:t>
+              <a:t>① 一覧に、発行したトークンが追加されます。</a:t>
             </a:r>
           </a:p>
           <a:p>
@@ -4701,7 +4761,7 @@
                 <a:latin typeface="游ゴシック"/>
                 <a:ea typeface="游ゴシック"/>
               </a:rPr>
-              <a:t>② 右側のコピーアイコンを押して、トークンをコピーします。</a:t>
+              <a:t>② トークン名と有効期限を確認します。</a:t>
             </a:r>
           </a:p>
           <a:p>
@@ -4724,30 +4784,7 @@
                 <a:latin typeface="游ゴシック"/>
                 <a:ea typeface="游ゴシック"/>
               </a:rPr>
-              <a:t>③ 目のアイコンを押すと、文字列を表示して確認できます。</a:t>
-            </a:r>
-          </a:p>
-          <a:p>
-            <a:pPr algn="l" eaLnBrk="1" latinLnBrk="0" hangingPunct="1">
-              <a:lnSpc>
-                <a:spcPct val="140000"/>
-              </a:lnSpc>
-              <a:spcBef>
-                <a:spcPts val="0"/>
-              </a:spcBef>
-              <a:spcAft>
-                <a:spcPts val="900"/>
-              </a:spcAft>
-            </a:pPr>
-            <a:r>
-              <a:rPr lang="ja-JP" altLang="en-US" sz="1200" b="0">
-                <a:solidFill>
-                  <a:srgbClr val="333333"/>
-                </a:solidFill>
-                <a:latin typeface="游ゴシック"/>
-                <a:ea typeface="游ゴシック"/>
-              </a:rPr>
-              <a:t>④ 「閉じる」を押します。</a:t>
+              <a:t>③ 有効期限が切れたら、更新アイコンから再発行します。</a:t>
             </a:r>
           </a:p>
         </p:txBody>
@@ -4815,7 +4852,7 @@
                 <a:latin typeface="游ゴシック"/>
                 <a:ea typeface="游ゴシック"/>
               </a:rPr>
-              <a:t>注意</a:t>
+              <a:t>補足</a:t>
             </a:r>
           </a:p>
           <a:p>
@@ -4838,7 +4875,7 @@
                 <a:latin typeface="游ゴシック"/>
                 <a:ea typeface="游ゴシック"/>
               </a:rPr>
-              <a:t>閉じると二度と表示されません。必ずコピーしてから閉じてください。</a:t>
+              <a:t>コピーしたトークンは、次ページの AI 接続設定で貼り付けます。</a:t>
             </a:r>
           </a:p>
         </p:txBody>
@@ -4930,17 +4967,17 @@
                 <a:latin typeface="游ゴシック"/>
                 <a:ea typeface="游ゴシック"/>
               </a:rPr>
-              <a:t>11 / 34</a:t>
+              <a:t>12 / 34</a:t>
             </a:r>
           </a:p>
         </p:txBody>
       </p:sp>
       <p:pic>
         <p:nvPicPr>
-          <p:cNvPr id="9" name="図 2" descr="The image shows a Japanese interface with a dialogue indicating that a NewtonX ADK Token has been generated, instructing the user to copy and securely store the token, and warning that the dialogue cannot be closed and reopened.&#10;&#10;AI 生成コンテンツは誤りを含む可能性があります。">
+          <p:cNvPr id="9" name="図 2">
             <a:extLst>
               <a:ext uri="{FF2B5EF4-FFF2-40B4-BE49-F238E27FC236}">
-                <a16:creationId xmlns:a16="http://schemas.microsoft.com/office/drawing/2014/main" id="{5D4177D6-5999-D90D-40FA-4A0352509FFA}"/>
+                <a16:creationId xmlns:a16="http://schemas.microsoft.com/office/drawing/2014/main" id="{75E8EA6E-9B92-1D4B-9A91-CC19E632A333}"/>
               </a:ext>
             </a:extLst>
           </p:cNvPr>
@@ -4957,8 +4994,8 @@
         </p:blipFill>
         <p:spPr>
           <a:xfrm>
-            <a:off x="5206000" y="2513667"/>
-            <a:ext cx="5600000" cy="2482666"/>
+            <a:off x="4505800" y="2025986"/>
+            <a:ext cx="7000400" cy="3458028"/>
           </a:xfrm>
           <a:prstGeom prst="rect">
             <a:avLst/>
@@ -4973,7 +5010,7 @@
     </p:spTree>
     <p:extLst>
       <p:ext uri="{BB962C8B-B14F-4D97-AF65-F5344CB8AC3E}">
-        <p14:creationId xmlns:p14="http://schemas.microsoft.com/office/powerpoint/2010/main" val="3078026385"/>
+        <p14:creationId xmlns:p14="http://schemas.microsoft.com/office/powerpoint/2010/main" val="1362645788"/>
       </p:ext>
     </p:extLst>
   </p:cSld>
@@ -5097,7 +5134,7 @@
                 <a:latin typeface="游ゴシック"/>
                 <a:ea typeface="游ゴシック"/>
               </a:rPr>
-              <a:t>PAT を取得する ⑦ 発行結果を確認する</a:t>
+              <a:t>AI 接続を設定する（設定 → AI接続）</a:t>
             </a:r>
           </a:p>
         </p:txBody>
@@ -5188,7 +5225,7 @@
                 <a:latin typeface="游ゴシック"/>
                 <a:ea typeface="游ゴシック"/>
               </a:rPr>
-              <a:t>① 一覧に、発行したトークンが追加されます。</a:t>
+              <a:t>① 上部メニューの「設定」を開きます。</a:t>
             </a:r>
           </a:p>
           <a:p>
@@ -5211,12 +5248,104 @@
                 <a:latin typeface="游ゴシック"/>
                 <a:ea typeface="游ゴシック"/>
               </a:rPr>
-              <a:t>② トークン名と有効期限を確認します。</a:t>
+              <a:t>② 「接続先URL（テナントホスト）」を、ご所属に応じて次のとおり入力します。</a:t>
             </a:r>
           </a:p>
           <a:p>
             <a:pPr algn="l" eaLnBrk="1" latinLnBrk="0" hangingPunct="1">
               <a:lnSpc>
+                <a:spcPct val="125000"/>
+              </a:lnSpc>
+              <a:spcBef>
+                <a:spcPts val="0"/>
+              </a:spcBef>
+              <a:spcAft>
+                <a:spcPts val="200"/>
+              </a:spcAft>
+            </a:pPr>
+            <a:r>
+              <a:rPr lang="ja-JP" altLang="en-US" sz="1100" b="0">
+                <a:solidFill>
+                  <a:srgbClr val="333333"/>
+                </a:solidFill>
+                <a:latin typeface="游ゴシック"/>
+                <a:ea typeface="游ゴシック"/>
+              </a:rPr>
+              <a:t>・セラク内勤者：seraku.newton-x.net</a:t>
+            </a:r>
+          </a:p>
+          <a:p>
+            <a:pPr algn="l" eaLnBrk="1" latinLnBrk="0" hangingPunct="1">
+              <a:lnSpc>
+                <a:spcPct val="125000"/>
+              </a:lnSpc>
+              <a:spcBef>
+                <a:spcPts val="0"/>
+              </a:spcBef>
+              <a:spcAft>
+                <a:spcPts val="200"/>
+              </a:spcAft>
+            </a:pPr>
+            <a:r>
+              <a:rPr lang="ja-JP" altLang="en-US" sz="1100" b="0">
+                <a:solidFill>
+                  <a:srgbClr val="333333"/>
+                </a:solidFill>
+                <a:latin typeface="游ゴシック"/>
+                <a:ea typeface="游ゴシック"/>
+              </a:rPr>
+              <a:t>・セラク常駐者：seraku-ex.newton-x.net</a:t>
+            </a:r>
+          </a:p>
+          <a:p>
+            <a:pPr algn="l" eaLnBrk="1" latinLnBrk="0" hangingPunct="1">
+              <a:lnSpc>
+                <a:spcPct val="125000"/>
+              </a:lnSpc>
+              <a:spcBef>
+                <a:spcPts val="0"/>
+              </a:spcBef>
+              <a:spcAft>
+                <a:spcPts val="200"/>
+              </a:spcAft>
+            </a:pPr>
+            <a:r>
+              <a:rPr lang="ja-JP" altLang="en-US" sz="1100" b="0">
+                <a:solidFill>
+                  <a:srgbClr val="333333"/>
+                </a:solidFill>
+                <a:latin typeface="游ゴシック"/>
+                <a:ea typeface="游ゴシック"/>
+              </a:rPr>
+              <a:t>・セラクビジネスソリューションズ：bs-seraku.newton-x.net</a:t>
+            </a:r>
+          </a:p>
+          <a:p>
+            <a:pPr algn="l" eaLnBrk="1" latinLnBrk="0" hangingPunct="1">
+              <a:lnSpc>
+                <a:spcPct val="125000"/>
+              </a:lnSpc>
+              <a:spcBef>
+                <a:spcPts val="0"/>
+              </a:spcBef>
+              <a:spcAft>
+                <a:spcPts val="200"/>
+              </a:spcAft>
+            </a:pPr>
+            <a:r>
+              <a:rPr lang="ja-JP" altLang="en-US" sz="1100" b="0">
+                <a:solidFill>
+                  <a:srgbClr val="333333"/>
+                </a:solidFill>
+                <a:latin typeface="游ゴシック"/>
+                <a:ea typeface="游ゴシック"/>
+              </a:rPr>
+              <a:t>・AND Think：andthink.newton-x.net</a:t>
+            </a:r>
+          </a:p>
+          <a:p>
+            <a:pPr algn="l" eaLnBrk="1" latinLnBrk="0" hangingPunct="1">
+              <a:lnSpc>
                 <a:spcPct val="140000"/>
               </a:lnSpc>
               <a:spcBef>
@@ -5234,7 +5363,53 @@
                 <a:latin typeface="游ゴシック"/>
                 <a:ea typeface="游ゴシック"/>
               </a:rPr>
-              <a:t>③ 有効期限が切れたら、更新アイコンから再発行します。</a:t>
+              <a:t>③ 「Personal Access Token」に、コピーしたトークンを貼り付け、「再認証する」を押します。</a:t>
+            </a:r>
+          </a:p>
+          <a:p>
+            <a:pPr algn="l" eaLnBrk="1" latinLnBrk="0" hangingPunct="1">
+              <a:lnSpc>
+                <a:spcPct val="140000"/>
+              </a:lnSpc>
+              <a:spcBef>
+                <a:spcPts val="0"/>
+              </a:spcBef>
+              <a:spcAft>
+                <a:spcPts val="900"/>
+              </a:spcAft>
+            </a:pPr>
+            <a:r>
+              <a:rPr lang="ja-JP" altLang="en-US" sz="1200" b="0">
+                <a:solidFill>
+                  <a:srgbClr val="333333"/>
+                </a:solidFill>
+                <a:latin typeface="游ゴシック"/>
+                <a:ea typeface="游ゴシック"/>
+              </a:rPr>
+              <a:t>④ 用途ごとのアシスタントは既定値のまま利用できます。変更したいときだけ選び直します。</a:t>
+            </a:r>
+          </a:p>
+          <a:p>
+            <a:pPr algn="l" eaLnBrk="1" latinLnBrk="0" hangingPunct="1">
+              <a:lnSpc>
+                <a:spcPct val="140000"/>
+              </a:lnSpc>
+              <a:spcBef>
+                <a:spcPts val="0"/>
+              </a:spcBef>
+              <a:spcAft>
+                <a:spcPts val="900"/>
+              </a:spcAft>
+            </a:pPr>
+            <a:r>
+              <a:rPr lang="ja-JP" altLang="en-US" sz="1200" b="0">
+                <a:solidFill>
+                  <a:srgbClr val="333333"/>
+                </a:solidFill>
+                <a:latin typeface="游ゴシック"/>
+                <a:ea typeface="游ゴシック"/>
+              </a:rPr>
+              <a:t>⑤ 「保存」を押します。</a:t>
             </a:r>
           </a:p>
         </p:txBody>
@@ -5302,7 +5477,7 @@
                 <a:latin typeface="游ゴシック"/>
                 <a:ea typeface="游ゴシック"/>
               </a:rPr>
-              <a:t>補足</a:t>
+              <a:t>注意</a:t>
             </a:r>
           </a:p>
           <a:p>
@@ -5325,112 +5500,14 @@
                 <a:latin typeface="游ゴシック"/>
                 <a:ea typeface="游ゴシック"/>
               </a:rPr>
-              <a:t>コピーしたトークンは、次ページの AI 接続設定で貼り付けます。</a:t>
-            </a:r>
-          </a:p>
-        </p:txBody>
-      </p:sp>
-      <p:sp>
-        <p:nvSpPr>
-          <p:cNvPr id="7" name="TextBox 7"/>
-          <p:cNvSpPr txBox="1"/>
-          <p:nvPr/>
-        </p:nvSpPr>
-        <p:spPr>
-          <a:xfrm>
-            <a:off x="685800" y="6280000"/>
-            <a:ext cx="5000000" cy="260000"/>
-          </a:xfrm>
-          <a:prstGeom prst="rect">
-            <a:avLst/>
-          </a:prstGeom>
-          <a:noFill/>
-        </p:spPr>
-        <p:txBody>
-          <a:bodyPr wrap="square" lIns="0" tIns="0" rIns="0" bIns="0" anchor="t">
-            <a:spAutoFit/>
-          </a:bodyPr>
-          <a:lstStyle/>
-          <a:p>
-            <a:pPr algn="l" eaLnBrk="1" latinLnBrk="0" hangingPunct="1">
-              <a:lnSpc>
-                <a:spcPct val="130000"/>
-              </a:lnSpc>
-              <a:spcBef>
-                <a:spcPts val="0"/>
-              </a:spcBef>
-              <a:spcAft>
-                <a:spcPts val="0"/>
-              </a:spcAft>
-            </a:pPr>
-            <a:r>
-              <a:rPr lang="ja-JP" altLang="en-US" sz="900" b="0">
-                <a:solidFill>
-                  <a:srgbClr val="7A7A7A"/>
-                </a:solidFill>
-                <a:latin typeface="游ゴシック"/>
-                <a:ea typeface="游ゴシック"/>
-              </a:rPr>
-              <a:t>ミチナリ ユーザ手順書</a:t>
-            </a:r>
-          </a:p>
-        </p:txBody>
-      </p:sp>
-      <p:sp>
-        <p:nvSpPr>
-          <p:cNvPr id="8" name="TextBox 8"/>
-          <p:cNvSpPr txBox="1"/>
-          <p:nvPr/>
-        </p:nvSpPr>
-        <p:spPr>
-          <a:xfrm>
-            <a:off x="9506200" y="6280000"/>
-            <a:ext cx="2000000" cy="260000"/>
-          </a:xfrm>
-          <a:prstGeom prst="rect">
-            <a:avLst/>
-          </a:prstGeom>
-          <a:noFill/>
-        </p:spPr>
-        <p:txBody>
-          <a:bodyPr wrap="square" lIns="0" tIns="0" rIns="0" bIns="0" anchor="t">
-            <a:spAutoFit/>
-          </a:bodyPr>
-          <a:lstStyle/>
-          <a:p>
-            <a:pPr algn="r" eaLnBrk="1" latinLnBrk="0" hangingPunct="1">
-              <a:lnSpc>
-                <a:spcPct val="130000"/>
-              </a:lnSpc>
-              <a:spcBef>
-                <a:spcPts val="0"/>
-              </a:spcBef>
-              <a:spcAft>
-                <a:spcPts val="0"/>
-              </a:spcAft>
-            </a:pPr>
-            <a:r>
-              <a:rPr lang="ja-JP" altLang="en-US" sz="900" b="0">
-                <a:solidFill>
-                  <a:srgbClr val="7A7A7A"/>
-                </a:solidFill>
-                <a:latin typeface="游ゴシック"/>
-                <a:ea typeface="游ゴシック"/>
-              </a:rPr>
-              <a:t>12 / 34</a:t>
+              <a:t>一覧にない場合は、NewtonXにログインするURL https://xxx.newton-x.net の xxx 部分です。誤ると「認証済み」表示のままエラーになります。</a:t>
             </a:r>
           </a:p>
         </p:txBody>
       </p:sp>
       <p:pic>
         <p:nvPicPr>
-          <p:cNvPr id="9" name="図 2">
-            <a:extLst>
-              <a:ext uri="{FF2B5EF4-FFF2-40B4-BE49-F238E27FC236}">
-                <a16:creationId xmlns:a16="http://schemas.microsoft.com/office/drawing/2014/main" id="{75E8EA6E-9B92-1D4B-9A91-CC19E632A333}"/>
-              </a:ext>
-            </a:extLst>
-          </p:cNvPr>
+          <p:cNvPr id="7" name="Picture 6" descr="image3.png"/>
           <p:cNvPicPr>
             <a:picLocks noChangeAspect="1"/>
           </p:cNvPicPr>
@@ -5444,8 +5521,8 @@
         </p:blipFill>
         <p:spPr>
           <a:xfrm>
-            <a:off x="4505800" y="2025986"/>
-            <a:ext cx="7000400" cy="3458028"/>
+            <a:off x="4505800" y="1533134"/>
+            <a:ext cx="7000400" cy="4443732"/>
           </a:xfrm>
           <a:prstGeom prst="rect">
             <a:avLst/>
@@ -5457,12 +5534,99 @@
           </a:ln>
         </p:spPr>
       </p:pic>
+      <p:sp>
+        <p:nvSpPr>
+          <p:cNvPr id="8" name="TextBox 7"/>
+          <p:cNvSpPr txBox="1"/>
+          <p:nvPr/>
+        </p:nvSpPr>
+        <p:spPr>
+          <a:xfrm>
+            <a:off x="685800" y="6280000"/>
+            <a:ext cx="5000000" cy="260000"/>
+          </a:xfrm>
+          <a:prstGeom prst="rect">
+            <a:avLst/>
+          </a:prstGeom>
+          <a:noFill/>
+        </p:spPr>
+        <p:txBody>
+          <a:bodyPr wrap="square" lIns="0" tIns="0" rIns="0" bIns="0" anchor="t">
+            <a:spAutoFit/>
+          </a:bodyPr>
+          <a:lstStyle/>
+          <a:p>
+            <a:pPr algn="l" eaLnBrk="1" latinLnBrk="0" hangingPunct="1">
+              <a:lnSpc>
+                <a:spcPct val="130000"/>
+              </a:lnSpc>
+              <a:spcBef>
+                <a:spcPts val="0"/>
+              </a:spcBef>
+              <a:spcAft>
+                <a:spcPts val="0"/>
+              </a:spcAft>
+            </a:pPr>
+            <a:r>
+              <a:rPr lang="ja-JP" altLang="en-US" sz="900" b="0">
+                <a:solidFill>
+                  <a:srgbClr val="7A7A7A"/>
+                </a:solidFill>
+                <a:latin typeface="游ゴシック"/>
+                <a:ea typeface="游ゴシック"/>
+              </a:rPr>
+              <a:t>ミチナリ ユーザ手順書</a:t>
+            </a:r>
+          </a:p>
+        </p:txBody>
+      </p:sp>
+      <p:sp>
+        <p:nvSpPr>
+          <p:cNvPr id="9" name="TextBox 8"/>
+          <p:cNvSpPr txBox="1"/>
+          <p:nvPr/>
+        </p:nvSpPr>
+        <p:spPr>
+          <a:xfrm>
+            <a:off x="9506200" y="6280000"/>
+            <a:ext cx="2000000" cy="260000"/>
+          </a:xfrm>
+          <a:prstGeom prst="rect">
+            <a:avLst/>
+          </a:prstGeom>
+          <a:noFill/>
+        </p:spPr>
+        <p:txBody>
+          <a:bodyPr wrap="square" lIns="0" tIns="0" rIns="0" bIns="0" anchor="t">
+            <a:spAutoFit/>
+          </a:bodyPr>
+          <a:lstStyle/>
+          <a:p>
+            <a:pPr algn="r" eaLnBrk="1" latinLnBrk="0" hangingPunct="1">
+              <a:lnSpc>
+                <a:spcPct val="130000"/>
+              </a:lnSpc>
+              <a:spcBef>
+                <a:spcPts val="0"/>
+              </a:spcBef>
+              <a:spcAft>
+                <a:spcPts val="0"/>
+              </a:spcAft>
+            </a:pPr>
+            <a:r>
+              <a:rPr lang="ja-JP" altLang="en-US" sz="900" b="0">
+                <a:solidFill>
+                  <a:srgbClr val="7A7A7A"/>
+                </a:solidFill>
+                <a:latin typeface="游ゴシック"/>
+                <a:ea typeface="游ゴシック"/>
+              </a:rPr>
+              <a:t>13 / 34</a:t>
+            </a:r>
+          </a:p>
+        </p:txBody>
+      </p:sp>
     </p:spTree>
-    <p:extLst>
-      <p:ext uri="{BB962C8B-B14F-4D97-AF65-F5344CB8AC3E}">
-        <p14:creationId xmlns:p14="http://schemas.microsoft.com/office/powerpoint/2010/main" val="1362645788"/>
-      </p:ext>
-    </p:extLst>
   </p:cSld>
   <p:clrMapOvr>
     <a:masterClrMapping/>
@@ -18619,7 +18783,7 @@
                 <a:latin typeface="游ゴシック"/>
                 <a:ea typeface="游ゴシック"/>
               </a:rPr>
-              <a:t>AI 接続を設定する（設定 → AI接続）</a:t>
+              <a:t>PAT を取得する ① NewtonX の Web 版を開く</a:t>
             </a:r>
           </a:p>
         </p:txBody>
@@ -18710,7 +18874,7 @@
                 <a:latin typeface="游ゴシック"/>
                 <a:ea typeface="游ゴシック"/>
               </a:rPr>
-              <a:t>① 上部メニューの「設定」を開きます。</a:t>
+              <a:t>① ブラウザで NewtonX の Web 版を開き、サインインします。</a:t>
             </a:r>
           </a:p>
           <a:p>
@@ -18733,168 +18897,30 @@
                 <a:latin typeface="游ゴシック"/>
                 <a:ea typeface="游ゴシック"/>
               </a:rPr>
-              <a:t>② 「接続先URL（テナントホスト）」を、ご所属に応じて次のとおり入力します。</a:t>
+              <a:t>② URL は https://xxx.newton-x.net です（xxx はご所属のサブドメイン）。</a:t>
             </a:r>
           </a:p>
           <a:p>
             <a:pPr algn="l" eaLnBrk="1" latinLnBrk="0" hangingPunct="1">
               <a:lnSpc>
-                <a:spcPct val="125000"/>
-              </a:lnSpc>
-              <a:spcBef>
-                <a:spcPts val="0"/>
-              </a:spcBef>
-              <a:spcAft>
-                <a:spcPts val="200"/>
-              </a:spcAft>
-            </a:pPr>
-            <a:r>
-              <a:rPr lang="ja-JP" altLang="en-US" sz="1100" b="0">
+                <a:spcPct val="140000"/>
+              </a:lnSpc>
+              <a:spcBef>
+                <a:spcPts val="0"/>
+              </a:spcBef>
+              <a:spcAft>
+                <a:spcPts val="900"/>
+              </a:spcAft>
+            </a:pPr>
+            <a:r>
+              <a:rPr lang="ja-JP" altLang="en-US" sz="1200" b="0">
                 <a:solidFill>
                   <a:srgbClr val="333333"/>
                 </a:solidFill>
                 <a:latin typeface="游ゴシック"/>
                 <a:ea typeface="游ゴシック"/>
               </a:rPr>
-              <a:t>・セラク内勤者：seraku.newton-x.net</a:t>
-            </a:r>
-          </a:p>
-          <a:p>
-            <a:pPr algn="l" eaLnBrk="1" latinLnBrk="0" hangingPunct="1">
-              <a:lnSpc>
-                <a:spcPct val="125000"/>
-              </a:lnSpc>
-              <a:spcBef>
-                <a:spcPts val="0"/>
-              </a:spcBef>
-              <a:spcAft>
-                <a:spcPts val="200"/>
-              </a:spcAft>
-            </a:pPr>
-            <a:r>
-              <a:rPr lang="ja-JP" altLang="en-US" sz="1100" b="0">
-                <a:solidFill>
-                  <a:srgbClr val="333333"/>
-                </a:solidFill>
-                <a:latin typeface="游ゴシック"/>
-                <a:ea typeface="游ゴシック"/>
-              </a:rPr>
-              <a:t>・セラク常駐者：seraku-ex.newton-x.net</a:t>
-            </a:r>
-          </a:p>
-          <a:p>
-            <a:pPr algn="l" eaLnBrk="1" latinLnBrk="0" hangingPunct="1">
-              <a:lnSpc>
-                <a:spcPct val="125000"/>
-              </a:lnSpc>
-              <a:spcBef>
-                <a:spcPts val="0"/>
-              </a:spcBef>
-              <a:spcAft>
-                <a:spcPts val="200"/>
-              </a:spcAft>
-            </a:pPr>
-            <a:r>
-              <a:rPr lang="ja-JP" altLang="en-US" sz="1100" b="0">
-                <a:solidFill>
-                  <a:srgbClr val="333333"/>
-                </a:solidFill>
-                <a:latin typeface="游ゴシック"/>
-                <a:ea typeface="游ゴシック"/>
-              </a:rPr>
-              <a:t>・セラクビジネスソリューションズ：bs-seraku.newton-x.net</a:t>
-            </a:r>
-          </a:p>
-          <a:p>
-            <a:pPr algn="l" eaLnBrk="1" latinLnBrk="0" hangingPunct="1">
-              <a:lnSpc>
-                <a:spcPct val="125000"/>
-              </a:lnSpc>
-              <a:spcBef>
-                <a:spcPts val="0"/>
-              </a:spcBef>
-              <a:spcAft>
-                <a:spcPts val="200"/>
-              </a:spcAft>
-            </a:pPr>
-            <a:r>
-              <a:rPr lang="ja-JP" altLang="en-US" sz="1100" b="0">
-                <a:solidFill>
-                  <a:srgbClr val="333333"/>
-                </a:solidFill>
-                <a:latin typeface="游ゴシック"/>
-                <a:ea typeface="游ゴシック"/>
-              </a:rPr>
-              <a:t>・AND Think：andthink.newton-x.net</a:t>
-            </a:r>
-          </a:p>
-          <a:p>
-            <a:pPr algn="l" eaLnBrk="1" latinLnBrk="0" hangingPunct="1">
-              <a:lnSpc>
-                <a:spcPct val="140000"/>
-              </a:lnSpc>
-              <a:spcBef>
-                <a:spcPts val="0"/>
-              </a:spcBef>
-              <a:spcAft>
-                <a:spcPts val="900"/>
-              </a:spcAft>
-            </a:pPr>
-            <a:r>
-              <a:rPr lang="ja-JP" altLang="en-US" sz="1200" b="0">
-                <a:solidFill>
-                  <a:srgbClr val="333333"/>
-                </a:solidFill>
-                <a:latin typeface="游ゴシック"/>
-                <a:ea typeface="游ゴシック"/>
-              </a:rPr>
-              <a:t>③ 「Personal Access Token」に、コピーしたトークンを貼り付け、「再認証する」を押します。</a:t>
-            </a:r>
-          </a:p>
-          <a:p>
-            <a:pPr algn="l" eaLnBrk="1" latinLnBrk="0" hangingPunct="1">
-              <a:lnSpc>
-                <a:spcPct val="140000"/>
-              </a:lnSpc>
-              <a:spcBef>
-                <a:spcPts val="0"/>
-              </a:spcBef>
-              <a:spcAft>
-                <a:spcPts val="900"/>
-              </a:spcAft>
-            </a:pPr>
-            <a:r>
-              <a:rPr lang="ja-JP" altLang="en-US" sz="1200" b="0">
-                <a:solidFill>
-                  <a:srgbClr val="333333"/>
-                </a:solidFill>
-                <a:latin typeface="游ゴシック"/>
-                <a:ea typeface="游ゴシック"/>
-              </a:rPr>
-              <a:t>④ 用途ごとのアシスタントは既定値のまま利用できます。変更したいときだけ選び直します。</a:t>
-            </a:r>
-          </a:p>
-          <a:p>
-            <a:pPr algn="l" eaLnBrk="1" latinLnBrk="0" hangingPunct="1">
-              <a:lnSpc>
-                <a:spcPct val="140000"/>
-              </a:lnSpc>
-              <a:spcBef>
-                <a:spcPts val="0"/>
-              </a:spcBef>
-              <a:spcAft>
-                <a:spcPts val="900"/>
-              </a:spcAft>
-            </a:pPr>
-            <a:r>
-              <a:rPr lang="ja-JP" altLang="en-US" sz="1200" b="0">
-                <a:solidFill>
-                  <a:srgbClr val="333333"/>
-                </a:solidFill>
-                <a:latin typeface="游ゴシック"/>
-                <a:ea typeface="游ゴシック"/>
-              </a:rPr>
-              <a:t>⑤ 「保存」を押します。</a:t>
+              <a:t>③ 左端のメニューから「アカウント」をクリックします。</a:t>
             </a:r>
           </a:p>
         </p:txBody>
@@ -18962,7 +18988,7 @@
                 <a:latin typeface="游ゴシック"/>
                 <a:ea typeface="游ゴシック"/>
               </a:rPr>
-              <a:t>注意</a:t>
+              <a:t>補足</a:t>
             </a:r>
           </a:p>
           <a:p>
@@ -18985,14 +19011,112 @@
                 <a:latin typeface="游ゴシック"/>
                 <a:ea typeface="游ゴシック"/>
               </a:rPr>
-              <a:t>一覧にない場合は、NewtonXにログインするURL https://xxx.newton-x.net の xxx 部分です。誤ると「認証済み」表示のままエラーになります。</a:t>
+              <a:t>この画面はミチナリではなく、ブラウザで開く NewtonX の Web 版です。</a:t>
+            </a:r>
+          </a:p>
+        </p:txBody>
+      </p:sp>
+      <p:sp>
+        <p:nvSpPr>
+          <p:cNvPr id="7" name="TextBox 7"/>
+          <p:cNvSpPr txBox="1"/>
+          <p:nvPr/>
+        </p:nvSpPr>
+        <p:spPr>
+          <a:xfrm>
+            <a:off x="685800" y="6280000"/>
+            <a:ext cx="5000000" cy="260000"/>
+          </a:xfrm>
+          <a:prstGeom prst="rect">
+            <a:avLst/>
+          </a:prstGeom>
+          <a:noFill/>
+        </p:spPr>
+        <p:txBody>
+          <a:bodyPr wrap="square" lIns="0" tIns="0" rIns="0" bIns="0" anchor="t">
+            <a:spAutoFit/>
+          </a:bodyPr>
+          <a:lstStyle/>
+          <a:p>
+            <a:pPr algn="l" eaLnBrk="1" latinLnBrk="0" hangingPunct="1">
+              <a:lnSpc>
+                <a:spcPct val="130000"/>
+              </a:lnSpc>
+              <a:spcBef>
+                <a:spcPts val="0"/>
+              </a:spcBef>
+              <a:spcAft>
+                <a:spcPts val="0"/>
+              </a:spcAft>
+            </a:pPr>
+            <a:r>
+              <a:rPr lang="ja-JP" altLang="en-US" sz="900" b="0">
+                <a:solidFill>
+                  <a:srgbClr val="7A7A7A"/>
+                </a:solidFill>
+                <a:latin typeface="游ゴシック"/>
+                <a:ea typeface="游ゴシック"/>
+              </a:rPr>
+              <a:t>ミチナリ ユーザ手順書</a:t>
+            </a:r>
+          </a:p>
+        </p:txBody>
+      </p:sp>
+      <p:sp>
+        <p:nvSpPr>
+          <p:cNvPr id="8" name="TextBox 8"/>
+          <p:cNvSpPr txBox="1"/>
+          <p:nvPr/>
+        </p:nvSpPr>
+        <p:spPr>
+          <a:xfrm>
+            <a:off x="9506200" y="6280000"/>
+            <a:ext cx="2000000" cy="260000"/>
+          </a:xfrm>
+          <a:prstGeom prst="rect">
+            <a:avLst/>
+          </a:prstGeom>
+          <a:noFill/>
+        </p:spPr>
+        <p:txBody>
+          <a:bodyPr wrap="square" lIns="0" tIns="0" rIns="0" bIns="0" anchor="t">
+            <a:spAutoFit/>
+          </a:bodyPr>
+          <a:lstStyle/>
+          <a:p>
+            <a:pPr algn="r" eaLnBrk="1" latinLnBrk="0" hangingPunct="1">
+              <a:lnSpc>
+                <a:spcPct val="130000"/>
+              </a:lnSpc>
+              <a:spcBef>
+                <a:spcPts val="0"/>
+              </a:spcBef>
+              <a:spcAft>
+                <a:spcPts val="0"/>
+              </a:spcAft>
+            </a:pPr>
+            <a:r>
+              <a:rPr lang="ja-JP" altLang="en-US" sz="900" b="0">
+                <a:solidFill>
+                  <a:srgbClr val="7A7A7A"/>
+                </a:solidFill>
+                <a:latin typeface="游ゴシック"/>
+                <a:ea typeface="游ゴシック"/>
+              </a:rPr>
+              <a:t>6 / 34</a:t>
             </a:r>
           </a:p>
         </p:txBody>
       </p:sp>
       <p:pic>
         <p:nvPicPr>
-          <p:cNvPr id="7" name="Picture 6" descr="image3.png"/>
+          <p:cNvPr id="9" name="図 2" descr="The image shows a user interface with a chatbot prompt, various options, and a search bar, possibly for a help or task request system.&#10;&#10;AI 生成コンテンツは誤りを含む可能性があります。">
+            <a:extLst>
+              <a:ext uri="{FF2B5EF4-FFF2-40B4-BE49-F238E27FC236}">
+                <a16:creationId xmlns:a16="http://schemas.microsoft.com/office/drawing/2014/main" id="{12161DD7-DDA8-1C1E-6EF2-E72B25B79895}"/>
+              </a:ext>
+            </a:extLst>
+          </p:cNvPr>
           <p:cNvPicPr>
             <a:picLocks noChangeAspect="1"/>
           </p:cNvPicPr>
@@ -19006,8 +19130,8 @@
         </p:blipFill>
         <p:spPr>
           <a:xfrm>
-            <a:off x="4505800" y="1533134"/>
-            <a:ext cx="7000400" cy="4443732"/>
+            <a:off x="4505800" y="2017715"/>
+            <a:ext cx="7000400" cy="3474570"/>
           </a:xfrm>
           <a:prstGeom prst="rect">
             <a:avLst/>
@@ -19021,97 +19145,56 @@
       </p:pic>
       <p:sp>
         <p:nvSpPr>
-          <p:cNvPr id="8" name="TextBox 7"/>
-          <p:cNvSpPr txBox="1"/>
-          <p:nvPr/>
-        </p:nvSpPr>
-        <p:spPr>
-          <a:xfrm>
-            <a:off x="685800" y="6280000"/>
-            <a:ext cx="5000000" cy="260000"/>
-          </a:xfrm>
-          <a:prstGeom prst="rect">
-            <a:avLst/>
-          </a:prstGeom>
-          <a:noFill/>
-        </p:spPr>
-        <p:txBody>
-          <a:bodyPr wrap="square" lIns="0" tIns="0" rIns="0" bIns="0" anchor="t">
-            <a:spAutoFit/>
-          </a:bodyPr>
-          <a:lstStyle/>
-          <a:p>
-            <a:pPr algn="l" eaLnBrk="1" latinLnBrk="0" hangingPunct="1">
-              <a:lnSpc>
-                <a:spcPct val="130000"/>
-              </a:lnSpc>
-              <a:spcBef>
-                <a:spcPts val="0"/>
-              </a:spcBef>
-              <a:spcAft>
-                <a:spcPts val="0"/>
-              </a:spcAft>
-            </a:pPr>
-            <a:r>
-              <a:rPr lang="ja-JP" altLang="en-US" sz="900" b="0">
-                <a:solidFill>
-                  <a:srgbClr val="7A7A7A"/>
-                </a:solidFill>
-                <a:latin typeface="游ゴシック"/>
-                <a:ea typeface="游ゴシック"/>
-              </a:rPr>
-              <a:t>ミチナリ ユーザ手順書</a:t>
-            </a:r>
-          </a:p>
-        </p:txBody>
-      </p:sp>
-      <p:sp>
-        <p:nvSpPr>
-          <p:cNvPr id="9" name="TextBox 8"/>
-          <p:cNvSpPr txBox="1"/>
-          <p:nvPr/>
-        </p:nvSpPr>
-        <p:spPr>
-          <a:xfrm>
-            <a:off x="9506200" y="6280000"/>
-            <a:ext cx="2000000" cy="260000"/>
-          </a:xfrm>
-          <a:prstGeom prst="rect">
-            <a:avLst/>
-          </a:prstGeom>
-          <a:noFill/>
-        </p:spPr>
-        <p:txBody>
-          <a:bodyPr wrap="square" lIns="0" tIns="0" rIns="0" bIns="0" anchor="t">
-            <a:spAutoFit/>
-          </a:bodyPr>
-          <a:lstStyle/>
-          <a:p>
-            <a:pPr algn="r" eaLnBrk="1" latinLnBrk="0" hangingPunct="1">
-              <a:lnSpc>
-                <a:spcPct val="130000"/>
-              </a:lnSpc>
-              <a:spcBef>
-                <a:spcPts val="0"/>
-              </a:spcBef>
-              <a:spcAft>
-                <a:spcPts val="0"/>
-              </a:spcAft>
-            </a:pPr>
-            <a:r>
-              <a:rPr lang="ja-JP" altLang="en-US" sz="900" b="0">
-                <a:solidFill>
-                  <a:srgbClr val="7A7A7A"/>
-                </a:solidFill>
-                <a:latin typeface="游ゴシック"/>
-                <a:ea typeface="游ゴシック"/>
-              </a:rPr>
-              <a:t>13 / 34</a:t>
-            </a:r>
+          <p:cNvPr id="10" name="正方形/長方形 9">
+            <a:extLst>
+              <a:ext uri="{FF2B5EF4-FFF2-40B4-BE49-F238E27FC236}">
+                <a16:creationId xmlns:a16="http://schemas.microsoft.com/office/drawing/2014/main" id="{CB5885D8-3F08-5614-983B-DAA4A2B924AE}"/>
+              </a:ext>
+            </a:extLst>
+          </p:cNvPr>
+          <p:cNvSpPr/>
+          <p:nvPr/>
+        </p:nvSpPr>
+        <p:spPr>
+          <a:xfrm>
+            <a:off x="5038344" y="3108960"/>
+            <a:ext cx="1325880" cy="2022820"/>
+          </a:xfrm>
+          <a:prstGeom prst="rect">
+            <a:avLst/>
+          </a:prstGeom>
+        </p:spPr>
+        <p:style>
+          <a:lnRef idx="2">
+            <a:schemeClr val="dk1">
+              <a:shade val="15000"/>
+            </a:schemeClr>
+          </a:lnRef>
+          <a:fillRef idx="1">
+            <a:schemeClr val="dk1"/>
+          </a:fillRef>
+          <a:effectRef idx="0">
+            <a:schemeClr val="dk1"/>
+          </a:effectRef>
+          <a:fontRef idx="minor">
+            <a:schemeClr val="lt1"/>
+          </a:fontRef>
+        </p:style>
+        <p:txBody>
+          <a:bodyPr rtlCol="0" anchor="ctr"/>
+          <a:lstStyle/>
+          <a:p>
+            <a:pPr algn="ctr"/>
+            <a:endParaRPr kumimoji="1" lang="ja-JP" altLang="en-US"/>
           </a:p>
         </p:txBody>
       </p:sp>
     </p:spTree>
+    <p:extLst>
+      <p:ext uri="{BB962C8B-B14F-4D97-AF65-F5344CB8AC3E}">
+        <p14:creationId xmlns:p14="http://schemas.microsoft.com/office/powerpoint/2010/main" val="3323469096"/>
+      </p:ext>
+    </p:extLst>
   </p:cSld>
   <p:clrMapOvr>
     <a:masterClrMapping/>
@@ -19233,7 +19316,7 @@
                 <a:latin typeface="游ゴシック"/>
                 <a:ea typeface="游ゴシック"/>
               </a:rPr>
-              <a:t>PAT を取得する ① NewtonX の Web 版を開く</a:t>
+              <a:t>PAT を取得する ② アカウント画面を開く</a:t>
             </a:r>
           </a:p>
         </p:txBody>
@@ -19324,7 +19407,7 @@
                 <a:latin typeface="游ゴシック"/>
                 <a:ea typeface="游ゴシック"/>
               </a:rPr>
-              <a:t>① ブラウザで NewtonX の Web 版を開き、サインインします。</a:t>
+              <a:t>① 「アカウント情報」が表示されます。</a:t>
             </a:r>
           </a:p>
           <a:p>
@@ -19347,30 +19430,7 @@
                 <a:latin typeface="游ゴシック"/>
                 <a:ea typeface="游ゴシック"/>
               </a:rPr>
-              <a:t>② URL は https://xxx.newton-x.net です（xxx はご所属のサブドメイン）。</a:t>
-            </a:r>
-          </a:p>
-          <a:p>
-            <a:pPr algn="l" eaLnBrk="1" latinLnBrk="0" hangingPunct="1">
-              <a:lnSpc>
-                <a:spcPct val="140000"/>
-              </a:lnSpc>
-              <a:spcBef>
-                <a:spcPts val="0"/>
-              </a:spcBef>
-              <a:spcAft>
-                <a:spcPts val="900"/>
-              </a:spcAft>
-            </a:pPr>
-            <a:r>
-              <a:rPr lang="ja-JP" altLang="en-US" sz="1200" b="0">
-                <a:solidFill>
-                  <a:srgbClr val="333333"/>
-                </a:solidFill>
-                <a:latin typeface="游ゴシック"/>
-                <a:ea typeface="游ゴシック"/>
-              </a:rPr>
-              <a:t>③ 左端のメニューから「アカウント」をクリックします。</a:t>
+              <a:t>② 左のメニューから「アクセストークン」をクリックします。</a:t>
             </a:r>
           </a:p>
         </p:txBody>
@@ -19461,7 +19521,7 @@
                 <a:latin typeface="游ゴシック"/>
                 <a:ea typeface="游ゴシック"/>
               </a:rPr>
-              <a:t>この画面はミチナリではなく、ブラウザで開く NewtonX の Web 版です。</a:t>
+              <a:t>表示される氏名・メールアドレスは、サインイン中のご自身のものです。</a:t>
             </a:r>
           </a:p>
         </p:txBody>
@@ -19553,17 +19613,17 @@
                 <a:latin typeface="游ゴシック"/>
                 <a:ea typeface="游ゴシック"/>
               </a:rPr>
-              <a:t>6 / 34</a:t>
+              <a:t>7 / 34</a:t>
             </a:r>
           </a:p>
         </p:txBody>
       </p:sp>
       <p:pic>
         <p:nvPicPr>
-          <p:cNvPr id="9" name="図 2" descr="The image shows a user interface with a chatbot prompt, various options, and a search bar, possibly for a help or task request system.&#10;&#10;AI 生成コンテンツは誤りを含む可能性があります。">
+          <p:cNvPr id="9" name="図 2" descr="The image is a screenshot of a user account settings page in a software application, featuring fields for account name, chat, email, department, and various options for tokens and templates.&#10;&#10;AI 生成コンテンツは誤りを含む可能性があります。">
             <a:extLst>
               <a:ext uri="{FF2B5EF4-FFF2-40B4-BE49-F238E27FC236}">
-                <a16:creationId xmlns:a16="http://schemas.microsoft.com/office/drawing/2014/main" id="{12161DD7-DDA8-1C1E-6EF2-E72B25B79895}"/>
+                <a16:creationId xmlns:a16="http://schemas.microsoft.com/office/drawing/2014/main" id="{D7402824-F8FF-B8C2-D8C9-9CE26CD342B6}"/>
               </a:ext>
             </a:extLst>
           </p:cNvPr>
@@ -19580,8 +19640,8 @@
         </p:blipFill>
         <p:spPr>
           <a:xfrm>
-            <a:off x="4505800" y="2017715"/>
-            <a:ext cx="7000400" cy="3474570"/>
+            <a:off x="4505800" y="2022264"/>
+            <a:ext cx="7000400" cy="3465472"/>
           </a:xfrm>
           <a:prstGeom prst="rect">
             <a:avLst/>
@@ -19593,10 +19653,102 @@
           </a:ln>
         </p:spPr>
       </p:pic>
+      <p:sp>
+        <p:nvSpPr>
+          <p:cNvPr id="11" name="正方形/長方形 10">
+            <a:extLst>
+              <a:ext uri="{FF2B5EF4-FFF2-40B4-BE49-F238E27FC236}">
+                <a16:creationId xmlns:a16="http://schemas.microsoft.com/office/drawing/2014/main" id="{736EE3E1-47E1-CB70-02F0-481840E87192}"/>
+              </a:ext>
+            </a:extLst>
+          </p:cNvPr>
+          <p:cNvSpPr/>
+          <p:nvPr/>
+        </p:nvSpPr>
+        <p:spPr>
+          <a:xfrm>
+            <a:off x="6795944" y="2322576"/>
+            <a:ext cx="483696" cy="228600"/>
+          </a:xfrm>
+          <a:prstGeom prst="rect">
+            <a:avLst/>
+          </a:prstGeom>
+        </p:spPr>
+        <p:style>
+          <a:lnRef idx="2">
+            <a:schemeClr val="dk1">
+              <a:shade val="15000"/>
+            </a:schemeClr>
+          </a:lnRef>
+          <a:fillRef idx="1">
+            <a:schemeClr val="dk1"/>
+          </a:fillRef>
+          <a:effectRef idx="0">
+            <a:schemeClr val="dk1"/>
+          </a:effectRef>
+          <a:fontRef idx="minor">
+            <a:schemeClr val="lt1"/>
+          </a:fontRef>
+        </p:style>
+        <p:txBody>
+          <a:bodyPr rtlCol="0" anchor="ctr"/>
+          <a:lstStyle/>
+          <a:p>
+            <a:pPr algn="ctr"/>
+            <a:endParaRPr kumimoji="1" lang="ja-JP" altLang="en-US" dirty="0"/>
+          </a:p>
+        </p:txBody>
+      </p:sp>
+      <p:sp>
+        <p:nvSpPr>
+          <p:cNvPr id="12" name="正方形/長方形 11">
+            <a:extLst>
+              <a:ext uri="{FF2B5EF4-FFF2-40B4-BE49-F238E27FC236}">
+                <a16:creationId xmlns:a16="http://schemas.microsoft.com/office/drawing/2014/main" id="{47DB19B2-B92D-0780-8F1A-051491CC271F}"/>
+              </a:ext>
+            </a:extLst>
+          </p:cNvPr>
+          <p:cNvSpPr/>
+          <p:nvPr/>
+        </p:nvSpPr>
+        <p:spPr>
+          <a:xfrm>
+            <a:off x="9086088" y="2322576"/>
+            <a:ext cx="1089152" cy="228600"/>
+          </a:xfrm>
+          <a:prstGeom prst="rect">
+            <a:avLst/>
+          </a:prstGeom>
+        </p:spPr>
+        <p:style>
+          <a:lnRef idx="2">
+            <a:schemeClr val="dk1">
+              <a:shade val="15000"/>
+            </a:schemeClr>
+          </a:lnRef>
+          <a:fillRef idx="1">
+            <a:schemeClr val="dk1"/>
+          </a:fillRef>
+          <a:effectRef idx="0">
+            <a:schemeClr val="dk1"/>
+          </a:effectRef>
+          <a:fontRef idx="minor">
+            <a:schemeClr val="lt1"/>
+          </a:fontRef>
+        </p:style>
+        <p:txBody>
+          <a:bodyPr rtlCol="0" anchor="ctr"/>
+          <a:lstStyle/>
+          <a:p>
+            <a:pPr algn="ctr"/>
+            <a:endParaRPr kumimoji="1" lang="ja-JP" altLang="en-US" dirty="0"/>
+          </a:p>
+        </p:txBody>
+      </p:sp>
     </p:spTree>
     <p:extLst>
       <p:ext uri="{BB962C8B-B14F-4D97-AF65-F5344CB8AC3E}">
-        <p14:creationId xmlns:p14="http://schemas.microsoft.com/office/powerpoint/2010/main" val="3323469096"/>
+        <p14:creationId xmlns:p14="http://schemas.microsoft.com/office/powerpoint/2010/main" val="4006661058"/>
       </p:ext>
     </p:extLst>
   </p:cSld>
@@ -19720,7 +19872,7 @@
                 <a:latin typeface="游ゴシック"/>
                 <a:ea typeface="游ゴシック"/>
               </a:rPr>
-              <a:t>PAT を取得する ② アカウント画面を開く</a:t>
+              <a:t>PAT を取得する ③ 「新規発行」をクリックする</a:t>
             </a:r>
           </a:p>
         </p:txBody>
@@ -19811,7 +19963,7 @@
                 <a:latin typeface="游ゴシック"/>
                 <a:ea typeface="游ゴシック"/>
               </a:rPr>
-              <a:t>① 「アカウント情報」が表示されます。</a:t>
+              <a:t>① 「NewtonX ADK Token」の一覧が表示されます。</a:t>
             </a:r>
           </a:p>
           <a:p>
@@ -19834,7 +19986,30 @@
                 <a:latin typeface="游ゴシック"/>
                 <a:ea typeface="游ゴシック"/>
               </a:rPr>
-              <a:t>② 左のメニューから「アクセストークン」をクリックします。</a:t>
+              <a:t>② 発行済みのトークンがある場合は、名前と有効期限が並びます。</a:t>
+            </a:r>
+          </a:p>
+          <a:p>
+            <a:pPr algn="l" eaLnBrk="1" latinLnBrk="0" hangingPunct="1">
+              <a:lnSpc>
+                <a:spcPct val="140000"/>
+              </a:lnSpc>
+              <a:spcBef>
+                <a:spcPts val="0"/>
+              </a:spcBef>
+              <a:spcAft>
+                <a:spcPts val="900"/>
+              </a:spcAft>
+            </a:pPr>
+            <a:r>
+              <a:rPr lang="ja-JP" altLang="en-US" sz="1200" b="0">
+                <a:solidFill>
+                  <a:srgbClr val="333333"/>
+                </a:solidFill>
+                <a:latin typeface="游ゴシック"/>
+                <a:ea typeface="游ゴシック"/>
+              </a:rPr>
+              <a:t>③ 右上の「＋ 新規発行」をクリックします。</a:t>
             </a:r>
           </a:p>
         </p:txBody>
@@ -19902,7 +20077,7 @@
                 <a:latin typeface="游ゴシック"/>
                 <a:ea typeface="游ゴシック"/>
               </a:rPr>
-              <a:t>補足</a:t>
+              <a:t>注意</a:t>
             </a:r>
           </a:p>
           <a:p>
@@ -19925,7 +20100,7 @@
                 <a:latin typeface="游ゴシック"/>
                 <a:ea typeface="游ゴシック"/>
               </a:rPr>
-              <a:t>表示される氏名・メールアドレスは、サインイン中のご自身のものです。</a:t>
+              <a:t>トークンは発行時にしか表示されません。控えていない場合は作り直します。</a:t>
             </a:r>
           </a:p>
         </p:txBody>
@@ -20017,17 +20192,17 @@
                 <a:latin typeface="游ゴシック"/>
                 <a:ea typeface="游ゴシック"/>
               </a:rPr>
-              <a:t>7 / 34</a:t>
+              <a:t>8 / 34</a:t>
             </a:r>
           </a:p>
         </p:txBody>
       </p:sp>
       <p:pic>
         <p:nvPicPr>
-          <p:cNvPr id="9" name="図 2" descr="The image is a screenshot of a user account settings page in a software application, featuring fields for account name, chat, email, department, and various options for tokens and templates.&#10;&#10;AI 生成コンテンツは誤りを含む可能性があります。">
+          <p:cNvPr id="9" name="図 2" descr="The image shows a screen with various options for managing an account, including a section for NewtonX ADK Token, which includes information about the token's creation and expiration date.&#10;&#10;AI 生成コンテンツは誤りを含む可能性があります。">
             <a:extLst>
               <a:ext uri="{FF2B5EF4-FFF2-40B4-BE49-F238E27FC236}">
-                <a16:creationId xmlns:a16="http://schemas.microsoft.com/office/drawing/2014/main" id="{D7402824-F8FF-B8C2-D8C9-9CE26CD342B6}"/>
+                <a16:creationId xmlns:a16="http://schemas.microsoft.com/office/drawing/2014/main" id="{7048EBE2-EE96-84AE-09D6-3D4BF38FAD71}"/>
               </a:ext>
             </a:extLst>
           </p:cNvPr>
@@ -20044,8 +20219,8 @@
         </p:blipFill>
         <p:spPr>
           <a:xfrm>
-            <a:off x="4505800" y="2022264"/>
-            <a:ext cx="7000400" cy="3465472"/>
+            <a:off x="4505800" y="2017674"/>
+            <a:ext cx="7000400" cy="3474651"/>
           </a:xfrm>
           <a:prstGeom prst="rect">
             <a:avLst/>
@@ -20060,7 +20235,7 @@
     </p:spTree>
     <p:extLst>
       <p:ext uri="{BB962C8B-B14F-4D97-AF65-F5344CB8AC3E}">
-        <p14:creationId xmlns:p14="http://schemas.microsoft.com/office/powerpoint/2010/main" val="4006661058"/>
+        <p14:creationId xmlns:p14="http://schemas.microsoft.com/office/powerpoint/2010/main" val="3554745515"/>
       </p:ext>
     </p:extLst>
   </p:cSld>
@@ -20184,7 +20359,7 @@
                 <a:latin typeface="游ゴシック"/>
                 <a:ea typeface="游ゴシック"/>
               </a:rPr>
-              <a:t>PAT を取得する ③ 「新規発行」をクリックする</a:t>
+              <a:t>PAT を取得する ④ 発行ダイアログを開く</a:t>
             </a:r>
           </a:p>
         </p:txBody>
@@ -20275,7 +20450,7 @@
                 <a:latin typeface="游ゴシック"/>
                 <a:ea typeface="游ゴシック"/>
               </a:rPr>
-              <a:t>① 「NewtonX ADK Token」の一覧が表示されます。</a:t>
+              <a:t>① 「NewtonX ADK Token 発行」ダイアログが開きます。</a:t>
             </a:r>
           </a:p>
           <a:p>
@@ -20298,30 +20473,7 @@
                 <a:latin typeface="游ゴシック"/>
                 <a:ea typeface="游ゴシック"/>
               </a:rPr>
-              <a:t>② 発行済みのトークンがある場合は、名前と有効期限が並びます。</a:t>
-            </a:r>
-          </a:p>
-          <a:p>
-            <a:pPr algn="l" eaLnBrk="1" latinLnBrk="0" hangingPunct="1">
-              <a:lnSpc>
-                <a:spcPct val="140000"/>
-              </a:lnSpc>
-              <a:spcBef>
-                <a:spcPts val="0"/>
-              </a:spcBef>
-              <a:spcAft>
-                <a:spcPts val="900"/>
-              </a:spcAft>
-            </a:pPr>
-            <a:r>
-              <a:rPr lang="ja-JP" altLang="en-US" sz="1200" b="0">
-                <a:solidFill>
-                  <a:srgbClr val="333333"/>
-                </a:solidFill>
-                <a:latin typeface="游ゴシック"/>
-                <a:ea typeface="游ゴシック"/>
-              </a:rPr>
-              <a:t>③ 右上の「＋ 新規発行」をクリックします。</a:t>
+              <a:t>② 「トークン名」が空のあいだは「発行する」を押せません。</a:t>
             </a:r>
           </a:p>
         </p:txBody>
@@ -20389,7 +20541,7 @@
                 <a:latin typeface="游ゴシック"/>
                 <a:ea typeface="游ゴシック"/>
               </a:rPr>
-              <a:t>注意</a:t>
+              <a:t>補足</a:t>
             </a:r>
           </a:p>
           <a:p>
@@ -20412,7 +20564,7 @@
                 <a:latin typeface="游ゴシック"/>
                 <a:ea typeface="游ゴシック"/>
               </a:rPr>
-              <a:t>トークンは発行時にしか表示されません。控えていない場合は作り直します。</a:t>
+              <a:t>トークン名は、あとから一覧で見分けるための名前です。</a:t>
             </a:r>
           </a:p>
         </p:txBody>
@@ -20504,17 +20656,17 @@
                 <a:latin typeface="游ゴシック"/>
                 <a:ea typeface="游ゴシック"/>
               </a:rPr>
-              <a:t>8 / 34</a:t>
+              <a:t>9 / 34</a:t>
             </a:r>
           </a:p>
         </p:txBody>
       </p:sp>
       <p:pic>
         <p:nvPicPr>
-          <p:cNvPr id="9" name="図 2" descr="The image shows a screen with various options for managing an account, including a section for NewtonX ADK Token, which includes information about the token's creation and expiration date.&#10;&#10;AI 生成コンテンツは誤りを含む可能性があります。">
+          <p:cNvPr id="9" name="図 2" descr="The image shows a user interface with a field for entering a token name, with options to cancel or proceed with the token generation.&#10;&#10;AI 生成コンテンツは誤りを含む可能性があります。">
             <a:extLst>
               <a:ext uri="{FF2B5EF4-FFF2-40B4-BE49-F238E27FC236}">
-                <a16:creationId xmlns:a16="http://schemas.microsoft.com/office/drawing/2014/main" id="{7048EBE2-EE96-84AE-09D6-3D4BF38FAD71}"/>
+                <a16:creationId xmlns:a16="http://schemas.microsoft.com/office/drawing/2014/main" id="{A9668B4F-A798-988A-849D-4A6882334B59}"/>
               </a:ext>
             </a:extLst>
           </p:cNvPr>
@@ -20531,8 +20683,8 @@
         </p:blipFill>
         <p:spPr>
           <a:xfrm>
-            <a:off x="4505800" y="2017674"/>
-            <a:ext cx="7000400" cy="3474651"/>
+            <a:off x="5206000" y="2577371"/>
+            <a:ext cx="5600000" cy="2355257"/>
           </a:xfrm>
           <a:prstGeom prst="rect">
             <a:avLst/>
@@ -20547,7 +20699,7 @@
     </p:spTree>
     <p:extLst>
       <p:ext uri="{BB962C8B-B14F-4D97-AF65-F5344CB8AC3E}">
-        <p14:creationId xmlns:p14="http://schemas.microsoft.com/office/powerpoint/2010/main" val="3554745515"/>
+        <p14:creationId xmlns:p14="http://schemas.microsoft.com/office/powerpoint/2010/main" val="1497915547"/>
       </p:ext>
     </p:extLst>
   </p:cSld>
